--- a/Lectures/week10/week10.pptx
+++ b/Lectures/week10/week10.pptx
@@ -20,6 +20,9 @@
     <p:sldId id="268" r:id="rId20"/>
     <p:sldId id="269" r:id="rId21"/>
     <p:sldId id="270" r:id="rId22"/>
+    <p:sldId id="271" r:id="rId23"/>
+    <p:sldId id="272" r:id="rId24"/>
+    <p:sldId id="273" r:id="rId25"/>
   </p:sldIdLst>
   <p:sldSz cx="12191695" cy="6858000" type="screen4x3"/>
   <p:notesSz cx="6858000" cy="9144000"/>
@@ -651,7 +654,80 @@
           <a:lstStyle/>
           <a:p>
             <a:r>
-              <a:t>Part three. Twenty minutes. Worksheet first — the worksheet is the deliverable.</a:t>
+              <a:t>Three scoping mistakes. Check your worksheet against these before you build.</a:t>
+            </a:r>
+          </a:p>
+          <a:p/>
+          <a:p>
+            <a:r>
+              <a:t>Building a system rather than a task. "A tool for managing referrals" is a project — it has</a:t>
+            </a:r>
+          </a:p>
+          <a:p>
+            <a:r>
+              <a:t>sub-parts, state, edge cases, and it will produce something that demos well and works badly.</a:t>
+            </a:r>
+          </a:p>
+          <a:p>
+            <a:r>
+              <a:t>"Draft the referral letter from these notes" is a task. And note the distinction that matters:</a:t>
+            </a:r>
+          </a:p>
+          <a:p>
+            <a:r>
+              <a:t>systems fail slowly and invisibly, tasks either work or don't. You want failures that announce</a:t>
+            </a:r>
+          </a:p>
+          <a:p>
+            <a:r>
+              <a:t>themselves.</a:t>
+            </a:r>
+          </a:p>
+          <a:p/>
+          <a:p>
+            <a:r>
+              <a:t>Automating the interesting part. This is the seductive one. The temptation is to hand over the</a:t>
+            </a:r>
+          </a:p>
+          <a:p>
+            <a:r>
+              <a:t>judgment — let it decide the diagnosis, the grade, the recommendation — and keep the typing for</a:t>
+            </a:r>
+          </a:p>
+          <a:p>
+            <a:r>
+              <a:t>yourself. Do exactly the opposite. Automate the tedium, keep the judgment. That's not only more</a:t>
+            </a:r>
+          </a:p>
+          <a:p>
+            <a:r>
+              <a:t>useful, it's the only version that's safe, and it's also the version that doesn't erode your own</a:t>
+            </a:r>
+          </a:p>
+          <a:p>
+            <a:r>
+              <a:t>skill.</a:t>
+            </a:r>
+          </a:p>
+          <a:p/>
+          <a:p>
+            <a:r>
+              <a:t>And designing for a task you cannot grade. If you can't tell whether the output is right, you</a:t>
+            </a:r>
+          </a:p>
+          <a:p>
+            <a:r>
+              <a:t>cannot build this responsibly, no matter how capable the tool is. You'd be deploying something</a:t>
+            </a:r>
+          </a:p>
+          <a:p>
+            <a:r>
+              <a:t>whose failures are invisible to the one person meant to be checking. Pick something where you</a:t>
+            </a:r>
+          </a:p>
+          <a:p>
+            <a:r>
+              <a:t>are the expert.</a:t>
             </a:r>
           </a:p>
         </p:txBody>
@@ -721,87 +797,89 @@
           <a:lstStyle/>
           <a:p>
             <a:r>
-              <a:t>Twenty minutes.</a:t>
+              <a:t>A common finding at question two, and one worth taking seriously rather than treating as a dead</a:t>
+            </a:r>
+          </a:p>
+          <a:p>
+            <a:r>
+              <a:t>end.</a:t>
             </a:r>
           </a:p>
           <a:p/>
           <a:p>
             <a:r>
-              <a:t>One. Fill the worksheet. All six questions. Ten minutes. Write it down — on paper is fine.</a:t>
-            </a:r>
-          </a:p>
-          <a:p>
-            <a:r>
-              <a:t>Everyone finishes this part, because it needs no tool, no account, and no internet. If your</a:t>
-            </a:r>
-          </a:p>
-          <a:p>
-            <a:r>
-              <a:t>laptop won't connect today, you can still complete the assessed work.</a:t>
+              <a:t>You get to "what sources hold the answers?" and the answer is: none. Nothing is written down. The</a:t>
+            </a:r>
+          </a:p>
+          <a:p>
+            <a:r>
+              <a:t>knowledge lives in three experienced people and in habit.</a:t>
             </a:r>
           </a:p>
           <a:p/>
           <a:p>
             <a:r>
-              <a:t>Two. Check it against the good-candidate list. If it fails on scope — and about half of them do</a:t>
-            </a:r>
-          </a:p>
-          <a:p>
-            <a:r>
-              <a:t>— cut it in half and fill the worksheet again. Cutting scope is the most common correction and</a:t>
-            </a:r>
-          </a:p>
-          <a:p>
-            <a:r>
-              <a:t>it's not a failure, it's the exercise working.</a:t>
+              <a:t>If that's true, grounding has nothing to work with, and no amount of tooling changes it.</a:t>
             </a:r>
           </a:p>
           <a:p/>
           <a:p>
             <a:r>
-              <a:t>Three. Then build as far as you get in the remaining ten minutes. Ground it, or make the tool,</a:t>
-            </a:r>
-          </a:p>
-          <a:p>
-            <a:r>
-              <a:t>or just write the three steps out properly. Any progress is fine. You will not finish, and</a:t>
-            </a:r>
-          </a:p>
-          <a:p>
-            <a:r>
-              <a:t>you're not meant to.</a:t>
+              <a:t>Two honest options. Write the knowledge down first — which is a real project with real value.</a:t>
+            </a:r>
+          </a:p>
+          <a:p>
+            <a:r>
+              <a:t>Or design something that doesn't need it.</a:t>
             </a:r>
           </a:p>
           <a:p/>
           <a:p>
             <a:r>
-              <a:t>And the bold line, one more time: the worksheet is the deliverable. The working system is a</a:t>
-            </a:r>
-          </a:p>
-          <a:p>
-            <a:r>
-              <a:t>bonus.</a:t>
+              <a:t>And here's the bold part, which I've watched happen several times. Often the most valuable</a:t>
+            </a:r>
+          </a:p>
+          <a:p>
+            <a:r>
+              <a:t>outcome of filling in this worksheet is discovering that your institution has never written down</a:t>
+            </a:r>
+          </a:p>
+          <a:p>
+            <a:r>
+              <a:t>how something is actually done.</a:t>
             </a:r>
           </a:p>
           <a:p/>
           <a:p>
             <a:r>
-              <a:t>[Circulate during the worksheet phase — that's where you add value. The two most common</a:t>
-            </a:r>
-          </a:p>
-          <a:p>
-            <a:r>
-              <a:t>problems: scope too large, and question six answered with a category rather than a person. Push</a:t>
-            </a:r>
-          </a:p>
-          <a:p>
-            <a:r>
-              <a:t>on both. If the room is quiet, fill the worksheet on screen for a problem from each discipline</a:t>
-            </a:r>
-          </a:p>
-          <a:p>
-            <a:r>
-              <a:t>present.]</a:t>
+              <a:t>That document — the one that doesn't exist yet — is usually worth more than the assistant would</a:t>
+            </a:r>
+          </a:p>
+          <a:p>
+            <a:r>
+              <a:t>have been. It survives staff turnover. It makes training possible. It can be checked and</a:t>
+            </a:r>
+          </a:p>
+          <a:p>
+            <a:r>
+              <a:t>corrected.</a:t>
+            </a:r>
+          </a:p>
+          <a:p/>
+          <a:p>
+            <a:r>
+              <a:t>And once it exists, the assistant becomes possible. So it isn't even a detour.</a:t>
+            </a:r>
+          </a:p>
+          <a:p/>
+          <a:p>
+            <a:r>
+              <a:t>If you reach question two and find nothing, you haven't failed the exercise. You've found the</a:t>
+            </a:r>
+          </a:p>
+          <a:p>
+            <a:r>
+              <a:t>actual problem.</a:t>
             </a:r>
           </a:p>
         </p:txBody>
@@ -871,77 +949,81 @@
           <a:lstStyle/>
           <a:p>
             <a:r>
-              <a:t>Two questions people consistently get wrong, whether or not you filled it in yourself.</a:t>
+              <a:t>Good candidates and bad ones. Check your idea against this before you spend twenty minutes.</a:t>
             </a:r>
           </a:p>
           <a:p/>
           <a:p>
             <a:r>
-              <a:t>Question three, the steps. Most first drafts have five or six. Almost all of them collapse to</a:t>
-            </a:r>
-          </a:p>
-          <a:p>
-            <a:r>
-              <a:t>two or three when you look properly, because people list *sub-tasks* rather than steps. "Read</a:t>
-            </a:r>
-          </a:p>
-          <a:p>
-            <a:r>
-              <a:t>the document" and "find the relevant part" are not two steps — that's one retrieval. Count</a:t>
-            </a:r>
-          </a:p>
-          <a:p>
-            <a:r>
-              <a:t>actual handoffs, where output from one stage becomes input to another.</a:t>
+              <a:t>Good: repetitive; the answer exists in a document you can point at; a wrong answer is</a:t>
+            </a:r>
+          </a:p>
+          <a:p>
+            <a:r>
+              <a:t>recoverable; delay harms nobody; and you personally understand the task well enough to grade</a:t>
+            </a:r>
+          </a:p>
+          <a:p>
+            <a:r>
+              <a:t>the output. That last one is easy to forget — if you can't tell whether the output is right,</a:t>
+            </a:r>
+          </a:p>
+          <a:p>
+            <a:r>
+              <a:t>you cannot build this responsibly, no matter how good the tool is.</a:t>
             </a:r>
           </a:p>
           <a:p/>
           <a:p>
             <a:r>
-              <a:t>Question six, who is harmed. And this is the one that matters most.</a:t>
+              <a:t>Bad: requires judgment you can't specify — if you can't write down the rule, the system can't</a:t>
+            </a:r>
+          </a:p>
+          <a:p>
+            <a:r>
+              <a:t>follow it. The answer isn't written down anywhere, so there's nothing to ground on. A wrong</a:t>
+            </a:r>
+          </a:p>
+          <a:p>
+            <a:r>
+              <a:t>answer reaches a patient, client or grade directly. Or it needs personal data to be useful at</a:t>
+            </a:r>
+          </a:p>
+          <a:p>
+            <a:r>
+              <a:t>all, which means the privacy problem isn't a detail you can solve later, it's the whole design.</a:t>
             </a:r>
           </a:p>
           <a:p/>
           <a:p>
             <a:r>
-              <a:t>"Users could get wrong information" is not an answer. It's a way of not answering — a sentence</a:t>
-            </a:r>
-          </a:p>
-          <a:p>
-            <a:r>
-              <a:t>shaped like a risk assessment that commits to nothing and changes no decision.</a:t>
+              <a:t>And the honest test, which I'd like you to apply for the rest of your career: would you be</a:t>
+            </a:r>
+          </a:p>
+          <a:p>
+            <a:r>
+              <a:t>comfortable showing this to the person most affected by it, and explaining exactly how it</a:t>
+            </a:r>
+          </a:p>
+          <a:p>
+            <a:r>
+              <a:t>works?</a:t>
             </a:r>
           </a:p>
           <a:p/>
           <a:p>
             <a:r>
-              <a:t>"A student misses a resit because they were told the wrong date" is an answer. It's specific,</a:t>
-            </a:r>
-          </a:p>
-          <a:p>
-            <a:r>
-              <a:t>it's plausible, and — crucially — it changes the design. The moment you write that sentence,</a:t>
-            </a:r>
-          </a:p>
-          <a:p>
-            <a:r>
-              <a:t>"let students query it directly" becomes obviously wrong. You don't need a rule; the specificity</a:t>
-            </a:r>
-          </a:p>
-          <a:p>
-            <a:r>
-              <a:t>does the work.</a:t>
-            </a:r>
-          </a:p>
-          <a:p/>
-          <a:p>
-            <a:r>
-              <a:t>Naming a specific person is the single most useful thing on this worksheet. If you fill in</a:t>
-            </a:r>
-          </a:p>
-          <a:p>
-            <a:r>
-              <a:t>nothing else properly, fill in that.</a:t>
+              <a:t>If the answer is no — if the design only survives because the affected person doesn't know</a:t>
+            </a:r>
+          </a:p>
+          <a:p>
+            <a:r>
+              <a:t>about it — then redesign it. Don't hide it. That instinct will keep you out of more trouble</a:t>
+            </a:r>
+          </a:p>
+          <a:p>
+            <a:r>
+              <a:t>than any rule I could give you.</a:t>
             </a:r>
           </a:p>
         </p:txBody>
@@ -1011,62 +1093,7 @@
           <a:lstStyle/>
           <a:p>
             <a:r>
-              <a:t>What's examinable. Five items, and this week appears on the final almost certainly.</a:t>
-            </a:r>
-          </a:p>
-          <a:p/>
-          <a:p>
-            <a:r>
-              <a:t>The six design questions. Be able to list them. A likely exam question gives you a proposed</a:t>
-            </a:r>
-          </a:p>
-          <a:p>
-            <a:r>
-              <a:t>workflow and asks which of the six was not answered.</a:t>
-            </a:r>
-          </a:p>
-          <a:p/>
-          <a:p>
-            <a:r>
-              <a:t>Good candidate criteria — including the one people forget, that you must understand the task</a:t>
-            </a:r>
-          </a:p>
-          <a:p>
-            <a:r>
-              <a:t>well enough to grade the output.</a:t>
-            </a:r>
-          </a:p>
-          <a:p/>
-          <a:p>
-            <a:r>
-              <a:t>Constraint over capability. In a good design, most decisions are about what the system must not</a:t>
-            </a:r>
-          </a:p>
-          <a:p>
-            <a:r>
-              <a:t>do. Learn that sentence; it's a short-answer question waiting to happen.</a:t>
-            </a:r>
-          </a:p>
-          <a:p/>
-          <a:p>
-            <a:r>
-              <a:t>Human placement: before the irreversible action, not at the end. And you identify the</a:t>
-            </a:r>
-          </a:p>
-          <a:p>
-            <a:r>
-              <a:t>irreversible step first, then place the human. That ordering is the examinable part.</a:t>
-            </a:r>
-          </a:p>
-          <a:p/>
-          <a:p>
-            <a:r>
-              <a:t>And naming the harmed person specifically rather than as a category, with the reason:</a:t>
-            </a:r>
-          </a:p>
-          <a:p>
-            <a:r>
-              <a:t>specificity changes the design.</a:t>
+              <a:t>Part three. Twenty minutes. Worksheet first — the worksheet is the deliverable.</a:t>
             </a:r>
           </a:p>
         </p:txBody>
@@ -1136,64 +1163,87 @@
           <a:lstStyle/>
           <a:p>
             <a:r>
-              <a:t>Five things.</a:t>
+              <a:t>Twenty minutes.</a:t>
             </a:r>
           </a:p>
           <a:p/>
           <a:p>
             <a:r>
-              <a:t>Design is the skill. Building is now the easy part, and that's a genuine shift — five years ago</a:t>
-            </a:r>
-          </a:p>
-          <a:p>
-            <a:r>
-              <a:t>the ratio was the other way round.</a:t>
+              <a:t>One. Fill the worksheet. All six questions. Ten minutes. Write it down — on paper is fine.</a:t>
+            </a:r>
+          </a:p>
+          <a:p>
+            <a:r>
+              <a:t>Everyone finishes this part, because it needs no tool, no account, and no internet. If your</a:t>
+            </a:r>
+          </a:p>
+          <a:p>
+            <a:r>
+              <a:t>laptop won't connect today, you can still complete the assessed work.</a:t>
             </a:r>
           </a:p>
           <a:p/>
           <a:p>
             <a:r>
-              <a:t>Six questions: task, sources, steps, human, how you'd know it works, who is harmed.</a:t>
+              <a:t>Two. Check it against the good-candidate list. If it fails on scope — and about half of them do</a:t>
+            </a:r>
+          </a:p>
+          <a:p>
+            <a:r>
+              <a:t>— cut it in half and fill the worksheet again. Cutting scope is the most common correction and</a:t>
+            </a:r>
+          </a:p>
+          <a:p>
+            <a:r>
+              <a:t>it's not a failure, it's the exercise working.</a:t>
             </a:r>
           </a:p>
           <a:p/>
           <a:p>
             <a:r>
-              <a:t>In a good design, most decisions are about what the system must not do.</a:t>
+              <a:t>Three. Then build as far as you get in the remaining ten minutes. Ground it, or make the tool,</a:t>
+            </a:r>
+          </a:p>
+          <a:p>
+            <a:r>
+              <a:t>or just write the three steps out properly. Any progress is fine. You will not finish, and</a:t>
+            </a:r>
+          </a:p>
+          <a:p>
+            <a:r>
+              <a:t>you're not meant to.</a:t>
             </a:r>
           </a:p>
           <a:p/>
           <a:p>
             <a:r>
-              <a:t>The human goes before the irreversible action.</a:t>
+              <a:t>And the bold line, one more time: the worksheet is the deliverable. The working system is a</a:t>
+            </a:r>
+          </a:p>
+          <a:p>
+            <a:r>
+              <a:t>bonus.</a:t>
             </a:r>
           </a:p>
           <a:p/>
           <a:p>
             <a:r>
-              <a:t>And name the person who would be harmed. A category is not an answer.</a:t>
-            </a:r>
-          </a:p>
-          <a:p/>
-          <a:p>
-            <a:r>
-              <a:t>Keep your worksheet. Next week we make the output look like real work from your profession —</a:t>
-            </a:r>
-          </a:p>
-          <a:p>
-            <a:r>
-              <a:t>SOAP notes, IRAC, lesson plans, briefs — and the week after, we attack something built exactly</a:t>
-            </a:r>
-          </a:p>
-          <a:p>
-            <a:r>
-              <a:t>like the thing you designed today. So the worksheet gets used twice more.</a:t>
-            </a:r>
-          </a:p>
-          <a:p/>
-          <a:p>
-            <a:r>
-              <a:t>Questions?</a:t>
+              <a:t>[Circulate during the worksheet phase — that's where you add value. The two most common</a:t>
+            </a:r>
+          </a:p>
+          <a:p>
+            <a:r>
+              <a:t>problems: scope too large, and question six answered with a category rather than a person. Push</a:t>
+            </a:r>
+          </a:p>
+          <a:p>
+            <a:r>
+              <a:t>on both. If the room is quiet, fill the worksheet on screen for a problem from each discipline</a:t>
+            </a:r>
+          </a:p>
+          <a:p>
+            <a:r>
+              <a:t>present.]</a:t>
             </a:r>
           </a:p>
         </p:txBody>
@@ -1263,6 +1313,398 @@
           <a:lstStyle/>
           <a:p>
             <a:r>
+              <a:t>Two questions people consistently get wrong, whether or not you filled it in yourself.</a:t>
+            </a:r>
+          </a:p>
+          <a:p/>
+          <a:p>
+            <a:r>
+              <a:t>Question three, the steps. Most first drafts have five or six. Almost all of them collapse to</a:t>
+            </a:r>
+          </a:p>
+          <a:p>
+            <a:r>
+              <a:t>two or three when you look properly, because people list *sub-tasks* rather than steps. "Read</a:t>
+            </a:r>
+          </a:p>
+          <a:p>
+            <a:r>
+              <a:t>the document" and "find the relevant part" are not two steps — that's one retrieval. Count</a:t>
+            </a:r>
+          </a:p>
+          <a:p>
+            <a:r>
+              <a:t>actual handoffs, where output from one stage becomes input to another.</a:t>
+            </a:r>
+          </a:p>
+          <a:p/>
+          <a:p>
+            <a:r>
+              <a:t>Question six, who is harmed. And this is the one that matters most.</a:t>
+            </a:r>
+          </a:p>
+          <a:p/>
+          <a:p>
+            <a:r>
+              <a:t>"Users could get wrong information" is not an answer. It's a way of not answering — a sentence</a:t>
+            </a:r>
+          </a:p>
+          <a:p>
+            <a:r>
+              <a:t>shaped like a risk assessment that commits to nothing and changes no decision.</a:t>
+            </a:r>
+          </a:p>
+          <a:p/>
+          <a:p>
+            <a:r>
+              <a:t>"A student misses a resit because they were told the wrong date" is an answer. It's specific,</a:t>
+            </a:r>
+          </a:p>
+          <a:p>
+            <a:r>
+              <a:t>it's plausible, and — crucially — it changes the design. The moment you write that sentence,</a:t>
+            </a:r>
+          </a:p>
+          <a:p>
+            <a:r>
+              <a:t>"let students query it directly" becomes obviously wrong. You don't need a rule; the specificity</a:t>
+            </a:r>
+          </a:p>
+          <a:p>
+            <a:r>
+              <a:t>does the work.</a:t>
+            </a:r>
+          </a:p>
+          <a:p/>
+          <a:p>
+            <a:r>
+              <a:t>Naming a specific person is the single most useful thing on this worksheet. If you fill in</a:t>
+            </a:r>
+          </a:p>
+          <a:p>
+            <a:r>
+              <a:t>nothing else properly, fill in that.</a:t>
+            </a:r>
+          </a:p>
+        </p:txBody>
+      </p:sp>
+      <p:sp>
+        <p:nvSpPr>
+          <p:cNvPr id="4" name="Slide Number Placeholder 3"/>
+          <p:cNvSpPr>
+            <a:spLocks noGrp="1"/>
+          </p:cNvSpPr>
+          <p:nvPr>
+            <p:ph type="sldNum" idx="5" sz="quarter"/>
+          </p:nvPr>
+        </p:nvSpPr>
+        <p:spPr/>
+      </p:sp>
+    </p:spTree>
+  </p:cSld>
+  <p:clrMapOvr>
+    <a:masterClrMapping/>
+  </p:clrMapOvr>
+</p:notes>
+</file>
+
+<file path=ppt/notesSlides/notesSlide16.xml><?xml version="1.0" encoding="utf-8"?>
+<p:notes xmlns:a="http://schemas.openxmlformats.org/drawingml/2006/main" xmlns:p="http://schemas.openxmlformats.org/presentationml/2006/main" xmlns:r="http://schemas.openxmlformats.org/officeDocument/2006/relationships">
+  <p:cSld>
+    <p:spTree>
+      <p:nvGrpSpPr>
+        <p:cNvPr id="1" name=""/>
+        <p:cNvGrpSpPr/>
+        <p:nvPr/>
+      </p:nvGrpSpPr>
+      <p:grpSpPr>
+        <a:xfrm>
+          <a:off x="0" y="0"/>
+          <a:ext cx="0" cy="0"/>
+          <a:chOff x="0" y="0"/>
+          <a:chExt cx="0" cy="0"/>
+        </a:xfrm>
+      </p:grpSpPr>
+      <p:sp>
+        <p:nvSpPr>
+          <p:cNvPr id="2" name="Slide Image Placeholder 1"/>
+          <p:cNvSpPr>
+            <a:spLocks noGrp="1"/>
+          </p:cNvSpPr>
+          <p:nvPr>
+            <p:ph type="sldImg" idx="2"/>
+          </p:nvPr>
+        </p:nvSpPr>
+        <p:spPr/>
+      </p:sp>
+      <p:sp>
+        <p:nvSpPr>
+          <p:cNvPr id="3" name="Notes Placeholder 2"/>
+          <p:cNvSpPr>
+            <a:spLocks noGrp="1"/>
+          </p:cNvSpPr>
+          <p:nvPr>
+            <p:ph type="body" idx="3" sz="quarter"/>
+          </p:nvPr>
+        </p:nvSpPr>
+        <p:spPr/>
+        <p:txBody>
+          <a:bodyPr/>
+          <a:lstStyle/>
+          <a:p>
+            <a:r>
+              <a:t>What's examinable. Five items, and this week appears on the final almost certainly.</a:t>
+            </a:r>
+          </a:p>
+          <a:p/>
+          <a:p>
+            <a:r>
+              <a:t>The six design questions. Be able to list them. A likely exam question gives you a proposed</a:t>
+            </a:r>
+          </a:p>
+          <a:p>
+            <a:r>
+              <a:t>workflow and asks which of the six was not answered.</a:t>
+            </a:r>
+          </a:p>
+          <a:p/>
+          <a:p>
+            <a:r>
+              <a:t>Good candidate criteria — including the one people forget, that you must understand the task</a:t>
+            </a:r>
+          </a:p>
+          <a:p>
+            <a:r>
+              <a:t>well enough to grade the output.</a:t>
+            </a:r>
+          </a:p>
+          <a:p/>
+          <a:p>
+            <a:r>
+              <a:t>Constraint over capability. In a good design, most decisions are about what the system must not</a:t>
+            </a:r>
+          </a:p>
+          <a:p>
+            <a:r>
+              <a:t>do. Learn that sentence; it's a short-answer question waiting to happen.</a:t>
+            </a:r>
+          </a:p>
+          <a:p/>
+          <a:p>
+            <a:r>
+              <a:t>Human placement: before the irreversible action, not at the end. And you identify the</a:t>
+            </a:r>
+          </a:p>
+          <a:p>
+            <a:r>
+              <a:t>irreversible step first, then place the human. That ordering is the examinable part.</a:t>
+            </a:r>
+          </a:p>
+          <a:p/>
+          <a:p>
+            <a:r>
+              <a:t>And naming the harmed person specifically rather than as a category, with the reason:</a:t>
+            </a:r>
+          </a:p>
+          <a:p>
+            <a:r>
+              <a:t>specificity changes the design.</a:t>
+            </a:r>
+          </a:p>
+        </p:txBody>
+      </p:sp>
+      <p:sp>
+        <p:nvSpPr>
+          <p:cNvPr id="4" name="Slide Number Placeholder 3"/>
+          <p:cNvSpPr>
+            <a:spLocks noGrp="1"/>
+          </p:cNvSpPr>
+          <p:nvPr>
+            <p:ph type="sldNum" idx="5" sz="quarter"/>
+          </p:nvPr>
+        </p:nvSpPr>
+        <p:spPr/>
+      </p:sp>
+    </p:spTree>
+  </p:cSld>
+  <p:clrMapOvr>
+    <a:masterClrMapping/>
+  </p:clrMapOvr>
+</p:notes>
+</file>
+
+<file path=ppt/notesSlides/notesSlide17.xml><?xml version="1.0" encoding="utf-8"?>
+<p:notes xmlns:a="http://schemas.openxmlformats.org/drawingml/2006/main" xmlns:p="http://schemas.openxmlformats.org/presentationml/2006/main" xmlns:r="http://schemas.openxmlformats.org/officeDocument/2006/relationships">
+  <p:cSld>
+    <p:spTree>
+      <p:nvGrpSpPr>
+        <p:cNvPr id="1" name=""/>
+        <p:cNvGrpSpPr/>
+        <p:nvPr/>
+      </p:nvGrpSpPr>
+      <p:grpSpPr>
+        <a:xfrm>
+          <a:off x="0" y="0"/>
+          <a:ext cx="0" cy="0"/>
+          <a:chOff x="0" y="0"/>
+          <a:chExt cx="0" cy="0"/>
+        </a:xfrm>
+      </p:grpSpPr>
+      <p:sp>
+        <p:nvSpPr>
+          <p:cNvPr id="2" name="Slide Image Placeholder 1"/>
+          <p:cNvSpPr>
+            <a:spLocks noGrp="1"/>
+          </p:cNvSpPr>
+          <p:nvPr>
+            <p:ph type="sldImg" idx="2"/>
+          </p:nvPr>
+        </p:nvSpPr>
+        <p:spPr/>
+      </p:sp>
+      <p:sp>
+        <p:nvSpPr>
+          <p:cNvPr id="3" name="Notes Placeholder 2"/>
+          <p:cNvSpPr>
+            <a:spLocks noGrp="1"/>
+          </p:cNvSpPr>
+          <p:nvPr>
+            <p:ph type="body" idx="3" sz="quarter"/>
+          </p:nvPr>
+        </p:nvSpPr>
+        <p:spPr/>
+        <p:txBody>
+          <a:bodyPr/>
+          <a:lstStyle/>
+          <a:p>
+            <a:r>
+              <a:t>Five things.</a:t>
+            </a:r>
+          </a:p>
+          <a:p/>
+          <a:p>
+            <a:r>
+              <a:t>Design is the skill. Building is now the easy part, and that's a genuine shift — five years ago</a:t>
+            </a:r>
+          </a:p>
+          <a:p>
+            <a:r>
+              <a:t>the ratio was the other way round.</a:t>
+            </a:r>
+          </a:p>
+          <a:p/>
+          <a:p>
+            <a:r>
+              <a:t>Six questions: task, sources, steps, human, how you'd know it works, who is harmed.</a:t>
+            </a:r>
+          </a:p>
+          <a:p/>
+          <a:p>
+            <a:r>
+              <a:t>In a good design, most decisions are about what the system must not do.</a:t>
+            </a:r>
+          </a:p>
+          <a:p/>
+          <a:p>
+            <a:r>
+              <a:t>The human goes before the irreversible action.</a:t>
+            </a:r>
+          </a:p>
+          <a:p/>
+          <a:p>
+            <a:r>
+              <a:t>And name the person who would be harmed. A category is not an answer.</a:t>
+            </a:r>
+          </a:p>
+          <a:p/>
+          <a:p>
+            <a:r>
+              <a:t>Keep your worksheet. Next week we make the output look like real work from your profession —</a:t>
+            </a:r>
+          </a:p>
+          <a:p>
+            <a:r>
+              <a:t>SOAP notes, IRAC, lesson plans, briefs — and the week after, we attack something built exactly</a:t>
+            </a:r>
+          </a:p>
+          <a:p>
+            <a:r>
+              <a:t>like the thing you designed today. So the worksheet gets used twice more.</a:t>
+            </a:r>
+          </a:p>
+          <a:p/>
+          <a:p>
+            <a:r>
+              <a:t>Questions?</a:t>
+            </a:r>
+          </a:p>
+        </p:txBody>
+      </p:sp>
+      <p:sp>
+        <p:nvSpPr>
+          <p:cNvPr id="4" name="Slide Number Placeholder 3"/>
+          <p:cNvSpPr>
+            <a:spLocks noGrp="1"/>
+          </p:cNvSpPr>
+          <p:nvPr>
+            <p:ph type="sldNum" idx="5" sz="quarter"/>
+          </p:nvPr>
+        </p:nvSpPr>
+        <p:spPr/>
+      </p:sp>
+    </p:spTree>
+  </p:cSld>
+  <p:clrMapOvr>
+    <a:masterClrMapping/>
+  </p:clrMapOvr>
+</p:notes>
+</file>
+
+<file path=ppt/notesSlides/notesSlide18.xml><?xml version="1.0" encoding="utf-8"?>
+<p:notes xmlns:a="http://schemas.openxmlformats.org/drawingml/2006/main" xmlns:p="http://schemas.openxmlformats.org/presentationml/2006/main" xmlns:r="http://schemas.openxmlformats.org/officeDocument/2006/relationships">
+  <p:cSld>
+    <p:spTree>
+      <p:nvGrpSpPr>
+        <p:cNvPr id="1" name=""/>
+        <p:cNvGrpSpPr/>
+        <p:nvPr/>
+      </p:nvGrpSpPr>
+      <p:grpSpPr>
+        <a:xfrm>
+          <a:off x="0" y="0"/>
+          <a:ext cx="0" cy="0"/>
+          <a:chOff x="0" y="0"/>
+          <a:chExt cx="0" cy="0"/>
+        </a:xfrm>
+      </p:grpSpPr>
+      <p:sp>
+        <p:nvSpPr>
+          <p:cNvPr id="2" name="Slide Image Placeholder 1"/>
+          <p:cNvSpPr>
+            <a:spLocks noGrp="1"/>
+          </p:cNvSpPr>
+          <p:nvPr>
+            <p:ph type="sldImg" idx="2"/>
+          </p:nvPr>
+        </p:nvSpPr>
+        <p:spPr/>
+      </p:sp>
+      <p:sp>
+        <p:nvSpPr>
+          <p:cNvPr id="3" name="Notes Placeholder 2"/>
+          <p:cNvSpPr>
+            <a:spLocks noGrp="1"/>
+          </p:cNvSpPr>
+          <p:nvPr>
+            <p:ph type="body" idx="3" sz="quarter"/>
+          </p:nvPr>
+        </p:nvSpPr>
+        <p:spPr/>
+        <p:txBody>
+          <a:bodyPr/>
+          <a:lstStyle/>
+          <a:p>
+            <a:r>
               <a:t>Take questions here.</a:t>
             </a:r>
           </a:p>
@@ -2242,81 +2684,99 @@
           <a:lstStyle/>
           <a:p>
             <a:r>
-              <a:t>Good candidates and bad ones. Check your idea against this before you spend twenty minutes.</a:t>
+              <a:t>The same six questions in a clinical setting, so you can see the pattern rather than one</a:t>
+            </a:r>
+          </a:p>
+          <a:p>
+            <a:r>
+              <a:t>instance.</a:t>
             </a:r>
           </a:p>
           <a:p/>
           <a:p>
             <a:r>
-              <a:t>Good: repetitive; the answer exists in a document you can point at; a wrong answer is</a:t>
-            </a:r>
-          </a:p>
-          <a:p>
-            <a:r>
-              <a:t>recoverable; delay harms nobody; and you personally understand the task well enough to grade</a:t>
-            </a:r>
-          </a:p>
-          <a:p>
-            <a:r>
-              <a:t>the output. That last one is easy to forget — if you can't tell whether the output is right,</a:t>
-            </a:r>
-          </a:p>
-          <a:p>
-            <a:r>
-              <a:t>you cannot build this responsibly, no matter how good the tool is.</a:t>
+              <a:t>Task: turn a consultation transcript into a structured note in our standard format. One</a:t>
+            </a:r>
+          </a:p>
+          <a:p>
+            <a:r>
+              <a:t>sentence.</a:t>
             </a:r>
           </a:p>
           <a:p/>
           <a:p>
             <a:r>
-              <a:t>Bad: requires judgment you can't specify — if you can't write down the rule, the system can't</a:t>
-            </a:r>
-          </a:p>
-          <a:p>
-            <a:r>
-              <a:t>follow it. The answer isn't written down anywhere, so there's nothing to ground on. A wrong</a:t>
-            </a:r>
-          </a:p>
-          <a:p>
-            <a:r>
-              <a:t>answer reaches a patient, client or grade directly. Or it needs personal data to be useful at</a:t>
-            </a:r>
-          </a:p>
-          <a:p>
-            <a:r>
-              <a:t>all, which means the privacy problem isn't a detail you can solve later, it's the whole design.</a:t>
+              <a:t>Sources: the department's note template and completed examples. Note what is *not* a source —</a:t>
+            </a:r>
+          </a:p>
+          <a:p>
+            <a:r>
+              <a:t>the patient record. That's a deliberate exclusion and it's driven by question six.</a:t>
             </a:r>
           </a:p>
           <a:p/>
           <a:p>
             <a:r>
-              <a:t>And the honest test, which I'd like you to apply for the rest of your career: would you be</a:t>
-            </a:r>
-          </a:p>
-          <a:p>
-            <a:r>
-              <a:t>comfortable showing this to the person most affected by it, and explaining exactly how it</a:t>
-            </a:r>
-          </a:p>
-          <a:p>
-            <a:r>
-              <a:t>works?</a:t>
+              <a:t>Steps: one. Transcript in, structured draft out. And I want to point out that "one step" is a</a:t>
+            </a:r>
+          </a:p>
+          <a:p>
+            <a:r>
+              <a:t>legitimate and often correct answer. There's no second step worth adding here, and adding one</a:t>
+            </a:r>
+          </a:p>
+          <a:p>
+            <a:r>
+              <a:t>would cost reliability for nothing.</a:t>
             </a:r>
           </a:p>
           <a:p/>
           <a:p>
             <a:r>
-              <a:t>If the answer is no — if the design only survives because the affected person doesn't know</a:t>
-            </a:r>
-          </a:p>
-          <a:p>
-            <a:r>
-              <a:t>about it — then redesign it. Don't hide it. That instinct will keep you out of more trouble</a:t>
-            </a:r>
-          </a:p>
-          <a:p>
-            <a:r>
-              <a:t>than any rule I could give you.</a:t>
+              <a:t>Human: before the note enters the record. The clinician edits and signs. The system never writes</a:t>
+            </a:r>
+          </a:p>
+          <a:p>
+            <a:r>
+              <a:t>to anything — it produces text on a screen.</a:t>
+            </a:r>
+          </a:p>
+          <a:p/>
+          <a:p>
+            <a:r>
+              <a:t>How I'd know: three transcripts where I already wrote the note by hand, compared. Plus — and</a:t>
+            </a:r>
+          </a:p>
+          <a:p>
+            <a:r>
+              <a:t>this is the good one — one transcript where a key symptom is mentioned only in passing, because</a:t>
+            </a:r>
+          </a:p>
+          <a:p>
+            <a:r>
+              <a:t>that's the failure I actually fear.</a:t>
+            </a:r>
+          </a:p>
+          <a:p/>
+          <a:p>
+            <a:r>
+              <a:t>Who is harmed: a patient whose reported symptom is dropped because it was mentioned once,</a:t>
+            </a:r>
+          </a:p>
+          <a:p>
+            <a:r>
+              <a:t>quietly, in the middle of a long transcript.</a:t>
+            </a:r>
+          </a:p>
+          <a:p/>
+          <a:p>
+            <a:r>
+              <a:t>Notice how question six generated question five. Once you name the harm, the test writes itself.</a:t>
+            </a:r>
+          </a:p>
+          <a:p>
+            <a:r>
+              <a:t>That's the mechanism I want you to use.</a:t>
             </a:r>
           </a:p>
         </p:txBody>
@@ -5603,14 +6063,48 @@
       <p:grpSpPr/>
       <p:sp>
         <p:nvSpPr>
-          <p:cNvPr id="2" name="Rectangle 1"/>
+          <p:cNvPr id="2" name="TextBox 1"/>
+          <p:cNvSpPr txBox="1"/>
+          <p:nvPr/>
+        </p:nvSpPr>
+        <p:spPr>
+          <a:xfrm>
+            <a:off x="777240" y="566928"/>
+            <a:ext cx="10637215" cy="822960"/>
+          </a:xfrm>
+          <a:prstGeom prst="rect">
+            <a:avLst/>
+          </a:prstGeom>
+          <a:noFill/>
+        </p:spPr>
+        <p:txBody>
+          <a:bodyPr wrap="square" lIns="0" rIns="0" tIns="0" bIns="0">
+            <a:spAutoFit/>
+          </a:bodyPr>
+          <a:lstStyle/>
+          <a:p>
+            <a:r>
+              <a:rPr sz="3000" b="1" i="0">
+                <a:solidFill>
+                  <a:srgbClr val="1F2937"/>
+                </a:solidFill>
+                <a:latin typeface="Calibri Light"/>
+              </a:rPr>
+              <a:t>Three Scoping Mistakes</a:t>
+            </a:r>
+          </a:p>
+        </p:txBody>
+      </p:sp>
+      <p:sp>
+        <p:nvSpPr>
+          <p:cNvPr id="3" name="Rectangle 2"/>
           <p:cNvSpPr/>
           <p:nvPr/>
         </p:nvSpPr>
         <p:spPr>
           <a:xfrm>
-            <a:off x="0" y="0"/>
-            <a:ext cx="292608" cy="6858000"/>
+            <a:off x="777240" y="1417320"/>
+            <a:ext cx="1051560" cy="38100"/>
           </a:xfrm>
           <a:prstGeom prst="rect">
             <a:avLst/>
@@ -5647,14 +6141,106 @@
       </p:sp>
       <p:sp>
         <p:nvSpPr>
-          <p:cNvPr id="3" name="TextBox 2"/>
+          <p:cNvPr id="4" name="Rounded Rectangle 3"/>
+          <p:cNvSpPr/>
+          <p:nvPr/>
+        </p:nvSpPr>
+        <p:spPr>
+          <a:xfrm>
+            <a:off x="777240" y="2057400"/>
+            <a:ext cx="3301898" cy="3200400"/>
+          </a:xfrm>
+          <a:prstGeom prst="roundRect">
+            <a:avLst>
+              <a:gd name="adj" fmla="val 10000"/>
+            </a:avLst>
+          </a:prstGeom>
+          <a:solidFill>
+            <a:srgbClr val="F1F5F9"/>
+          </a:solidFill>
+          <a:ln w="15875">
+            <a:solidFill>
+              <a:srgbClr val="D3DDE6"/>
+            </a:solidFill>
+          </a:ln>
+          <a:effectLst/>
+        </p:spPr>
+        <p:style>
+          <a:lnRef idx="1">
+            <a:schemeClr val="accent1"/>
+          </a:lnRef>
+          <a:fillRef idx="3">
+            <a:schemeClr val="accent1"/>
+          </a:fillRef>
+          <a:effectRef idx="2">
+            <a:schemeClr val="accent1"/>
+          </a:effectRef>
+          <a:fontRef idx="minor">
+            <a:schemeClr val="lt1"/>
+          </a:fontRef>
+        </p:style>
+        <p:txBody>
+          <a:bodyPr rtlCol="0" anchor="ctr"/>
+          <a:lstStyle/>
+          <a:p>
+            <a:pPr algn="ctr"/>
+          </a:p>
+        </p:txBody>
+      </p:sp>
+      <p:sp>
+        <p:nvSpPr>
+          <p:cNvPr id="5" name="Rectangle 4"/>
+          <p:cNvSpPr/>
+          <p:nvPr/>
+        </p:nvSpPr>
+        <p:spPr>
+          <a:xfrm>
+            <a:off x="978408" y="2331720"/>
+            <a:ext cx="640080" cy="38100"/>
+          </a:xfrm>
+          <a:prstGeom prst="rect">
+            <a:avLst/>
+          </a:prstGeom>
+          <a:solidFill>
+            <a:srgbClr val="0F766E"/>
+          </a:solidFill>
+          <a:ln>
+            <a:noFill/>
+          </a:ln>
+          <a:effectLst/>
+        </p:spPr>
+        <p:style>
+          <a:lnRef idx="1">
+            <a:schemeClr val="accent1"/>
+          </a:lnRef>
+          <a:fillRef idx="3">
+            <a:schemeClr val="accent1"/>
+          </a:fillRef>
+          <a:effectRef idx="2">
+            <a:schemeClr val="accent1"/>
+          </a:effectRef>
+          <a:fontRef idx="minor">
+            <a:schemeClr val="lt1"/>
+          </a:fontRef>
+        </p:style>
+        <p:txBody>
+          <a:bodyPr rtlCol="0" anchor="ctr"/>
+          <a:lstStyle/>
+          <a:p>
+            <a:pPr algn="ctr"/>
+          </a:p>
+        </p:txBody>
+      </p:sp>
+      <p:sp>
+        <p:nvSpPr>
+          <p:cNvPr id="6" name="TextBox 5"/>
           <p:cNvSpPr txBox="1"/>
           <p:nvPr/>
         </p:nvSpPr>
         <p:spPr>
           <a:xfrm>
-            <a:off x="1280160" y="2743200"/>
-            <a:ext cx="10058400" cy="457200"/>
+            <a:off x="978408" y="2560320"/>
+            <a:ext cx="2899562" cy="640080"/>
           </a:xfrm>
           <a:prstGeom prst="rect">
             <a:avLst/>
@@ -5662,33 +6248,41 @@
           <a:noFill/>
         </p:spPr>
         <p:txBody>
-          <a:bodyPr wrap="square" lIns="0" rIns="0" tIns="0" bIns="0">
+          <a:bodyPr wrap="square" lIns="0" rIns="0" tIns="0" bIns="0" anchor="t">
             <a:spAutoFit/>
           </a:bodyPr>
           <a:lstStyle/>
           <a:p>
-            <a:r>
-              <a:rPr sz="1400" b="1" i="0">
-                <a:solidFill>
-                  <a:srgbClr val="0F766E"/>
-                </a:solidFill>
-                <a:latin typeface="Calibri"/>
-              </a:rPr>
-              <a:t>PART 3</a:t>
-            </a:r>
-          </a:p>
-        </p:txBody>
-      </p:sp>
-      <p:sp>
-        <p:nvSpPr>
-          <p:cNvPr id="4" name="TextBox 3"/>
+            <a:pPr algn="l">
+              <a:lnSpc>
+                <a:spcPct val="105000"/>
+              </a:lnSpc>
+              <a:spcAft>
+                <a:spcPts val="200"/>
+              </a:spcAft>
+            </a:pPr>
+            <a:r>
+              <a:rPr sz="1800" b="1" i="0">
+                <a:solidFill>
+                  <a:srgbClr val="1F2937"/>
+                </a:solidFill>
+                <a:latin typeface="Calibri"/>
+              </a:rPr>
+              <a:t>Building a system, not a task</a:t>
+            </a:r>
+          </a:p>
+        </p:txBody>
+      </p:sp>
+      <p:sp>
+        <p:nvSpPr>
+          <p:cNvPr id="7" name="TextBox 6"/>
           <p:cNvSpPr txBox="1"/>
           <p:nvPr/>
         </p:nvSpPr>
         <p:spPr>
           <a:xfrm>
-            <a:off x="1280160" y="3200400"/>
-            <a:ext cx="10058400" cy="1097280"/>
+            <a:off x="978408" y="3246120"/>
+            <a:ext cx="2899562" cy="1737360"/>
           </a:xfrm>
           <a:prstGeom prst="rect">
             <a:avLst/>
@@ -5696,19 +6290,448 @@
           <a:noFill/>
         </p:spPr>
         <p:txBody>
+          <a:bodyPr wrap="square" lIns="0" rIns="0" tIns="0" bIns="0" anchor="t">
+            <a:spAutoFit/>
+          </a:bodyPr>
+          <a:lstStyle/>
+          <a:p>
+            <a:pPr algn="l">
+              <a:lnSpc>
+                <a:spcPct val="105000"/>
+              </a:lnSpc>
+              <a:spcAft>
+                <a:spcPts val="200"/>
+              </a:spcAft>
+            </a:pPr>
+            <a:r>
+              <a:rPr sz="1350" b="0" i="0">
+                <a:solidFill>
+                  <a:srgbClr val="333D4B"/>
+                </a:solidFill>
+                <a:latin typeface="Calibri"/>
+              </a:rPr>
+              <a:t>"A tool for managing referrals" is a project. "Draft the referral letter from these notes" is a task. Systems fail slowly and invisibly; tasks either work or do not.</a:t>
+            </a:r>
+          </a:p>
+        </p:txBody>
+      </p:sp>
+      <p:sp>
+        <p:nvSpPr>
+          <p:cNvPr id="8" name="Rounded Rectangle 7"/>
+          <p:cNvSpPr/>
+          <p:nvPr/>
+        </p:nvSpPr>
+        <p:spPr>
+          <a:xfrm>
+            <a:off x="4444898" y="2057400"/>
+            <a:ext cx="3301898" cy="3200400"/>
+          </a:xfrm>
+          <a:prstGeom prst="roundRect">
+            <a:avLst>
+              <a:gd name="adj" fmla="val 10000"/>
+            </a:avLst>
+          </a:prstGeom>
+          <a:solidFill>
+            <a:srgbClr val="F1F5F9"/>
+          </a:solidFill>
+          <a:ln w="15875">
+            <a:solidFill>
+              <a:srgbClr val="D3DDE6"/>
+            </a:solidFill>
+          </a:ln>
+          <a:effectLst/>
+        </p:spPr>
+        <p:style>
+          <a:lnRef idx="1">
+            <a:schemeClr val="accent1"/>
+          </a:lnRef>
+          <a:fillRef idx="3">
+            <a:schemeClr val="accent1"/>
+          </a:fillRef>
+          <a:effectRef idx="2">
+            <a:schemeClr val="accent1"/>
+          </a:effectRef>
+          <a:fontRef idx="minor">
+            <a:schemeClr val="lt1"/>
+          </a:fontRef>
+        </p:style>
+        <p:txBody>
+          <a:bodyPr rtlCol="0" anchor="ctr"/>
+          <a:lstStyle/>
+          <a:p>
+            <a:pPr algn="ctr"/>
+          </a:p>
+        </p:txBody>
+      </p:sp>
+      <p:sp>
+        <p:nvSpPr>
+          <p:cNvPr id="9" name="Rectangle 8"/>
+          <p:cNvSpPr/>
+          <p:nvPr/>
+        </p:nvSpPr>
+        <p:spPr>
+          <a:xfrm>
+            <a:off x="4646066" y="2331720"/>
+            <a:ext cx="640080" cy="38100"/>
+          </a:xfrm>
+          <a:prstGeom prst="rect">
+            <a:avLst/>
+          </a:prstGeom>
+          <a:solidFill>
+            <a:srgbClr val="0F766E"/>
+          </a:solidFill>
+          <a:ln>
+            <a:noFill/>
+          </a:ln>
+          <a:effectLst/>
+        </p:spPr>
+        <p:style>
+          <a:lnRef idx="1">
+            <a:schemeClr val="accent1"/>
+          </a:lnRef>
+          <a:fillRef idx="3">
+            <a:schemeClr val="accent1"/>
+          </a:fillRef>
+          <a:effectRef idx="2">
+            <a:schemeClr val="accent1"/>
+          </a:effectRef>
+          <a:fontRef idx="minor">
+            <a:schemeClr val="lt1"/>
+          </a:fontRef>
+        </p:style>
+        <p:txBody>
+          <a:bodyPr rtlCol="0" anchor="ctr"/>
+          <a:lstStyle/>
+          <a:p>
+            <a:pPr algn="ctr"/>
+          </a:p>
+        </p:txBody>
+      </p:sp>
+      <p:sp>
+        <p:nvSpPr>
+          <p:cNvPr id="10" name="TextBox 9"/>
+          <p:cNvSpPr txBox="1"/>
+          <p:nvPr/>
+        </p:nvSpPr>
+        <p:spPr>
+          <a:xfrm>
+            <a:off x="4646066" y="2560320"/>
+            <a:ext cx="2899562" cy="640080"/>
+          </a:xfrm>
+          <a:prstGeom prst="rect">
+            <a:avLst/>
+          </a:prstGeom>
+          <a:noFill/>
+        </p:spPr>
+        <p:txBody>
+          <a:bodyPr wrap="square" lIns="0" rIns="0" tIns="0" bIns="0" anchor="t">
+            <a:spAutoFit/>
+          </a:bodyPr>
+          <a:lstStyle/>
+          <a:p>
+            <a:pPr algn="l">
+              <a:lnSpc>
+                <a:spcPct val="105000"/>
+              </a:lnSpc>
+              <a:spcAft>
+                <a:spcPts val="200"/>
+              </a:spcAft>
+            </a:pPr>
+            <a:r>
+              <a:rPr sz="1800" b="1" i="0">
+                <a:solidFill>
+                  <a:srgbClr val="1F2937"/>
+                </a:solidFill>
+                <a:latin typeface="Calibri"/>
+              </a:rPr>
+              <a:t>Automating the interesting part</a:t>
+            </a:r>
+          </a:p>
+        </p:txBody>
+      </p:sp>
+      <p:sp>
+        <p:nvSpPr>
+          <p:cNvPr id="11" name="TextBox 10"/>
+          <p:cNvSpPr txBox="1"/>
+          <p:nvPr/>
+        </p:nvSpPr>
+        <p:spPr>
+          <a:xfrm>
+            <a:off x="4646066" y="3246120"/>
+            <a:ext cx="2899562" cy="1737360"/>
+          </a:xfrm>
+          <a:prstGeom prst="rect">
+            <a:avLst/>
+          </a:prstGeom>
+          <a:noFill/>
+        </p:spPr>
+        <p:txBody>
+          <a:bodyPr wrap="square" lIns="0" rIns="0" tIns="0" bIns="0" anchor="t">
+            <a:spAutoFit/>
+          </a:bodyPr>
+          <a:lstStyle/>
+          <a:p>
+            <a:pPr algn="l">
+              <a:lnSpc>
+                <a:spcPct val="105000"/>
+              </a:lnSpc>
+              <a:spcAft>
+                <a:spcPts val="200"/>
+              </a:spcAft>
+            </a:pPr>
+            <a:r>
+              <a:rPr sz="1350" b="0" i="0">
+                <a:solidFill>
+                  <a:srgbClr val="333D4B"/>
+                </a:solidFill>
+                <a:latin typeface="Calibri"/>
+              </a:rPr>
+              <a:t>The temptation is to hand over the judgment and keep the typing. Do the opposite — automate the tedium, keep the judgment. It is also the only version that is safe.</a:t>
+            </a:r>
+          </a:p>
+        </p:txBody>
+      </p:sp>
+      <p:sp>
+        <p:nvSpPr>
+          <p:cNvPr id="12" name="Rounded Rectangle 11"/>
+          <p:cNvSpPr/>
+          <p:nvPr/>
+        </p:nvSpPr>
+        <p:spPr>
+          <a:xfrm>
+            <a:off x="8112556" y="2057400"/>
+            <a:ext cx="3301898" cy="3200400"/>
+          </a:xfrm>
+          <a:prstGeom prst="roundRect">
+            <a:avLst>
+              <a:gd name="adj" fmla="val 10000"/>
+            </a:avLst>
+          </a:prstGeom>
+          <a:solidFill>
+            <a:srgbClr val="F1F5F9"/>
+          </a:solidFill>
+          <a:ln w="15875">
+            <a:solidFill>
+              <a:srgbClr val="D3DDE6"/>
+            </a:solidFill>
+          </a:ln>
+          <a:effectLst/>
+        </p:spPr>
+        <p:style>
+          <a:lnRef idx="1">
+            <a:schemeClr val="accent1"/>
+          </a:lnRef>
+          <a:fillRef idx="3">
+            <a:schemeClr val="accent1"/>
+          </a:fillRef>
+          <a:effectRef idx="2">
+            <a:schemeClr val="accent1"/>
+          </a:effectRef>
+          <a:fontRef idx="minor">
+            <a:schemeClr val="lt1"/>
+          </a:fontRef>
+        </p:style>
+        <p:txBody>
+          <a:bodyPr rtlCol="0" anchor="ctr"/>
+          <a:lstStyle/>
+          <a:p>
+            <a:pPr algn="ctr"/>
+          </a:p>
+        </p:txBody>
+      </p:sp>
+      <p:sp>
+        <p:nvSpPr>
+          <p:cNvPr id="13" name="Rectangle 12"/>
+          <p:cNvSpPr/>
+          <p:nvPr/>
+        </p:nvSpPr>
+        <p:spPr>
+          <a:xfrm>
+            <a:off x="8313724" y="2331720"/>
+            <a:ext cx="640080" cy="38100"/>
+          </a:xfrm>
+          <a:prstGeom prst="rect">
+            <a:avLst/>
+          </a:prstGeom>
+          <a:solidFill>
+            <a:srgbClr val="0F766E"/>
+          </a:solidFill>
+          <a:ln>
+            <a:noFill/>
+          </a:ln>
+          <a:effectLst/>
+        </p:spPr>
+        <p:style>
+          <a:lnRef idx="1">
+            <a:schemeClr val="accent1"/>
+          </a:lnRef>
+          <a:fillRef idx="3">
+            <a:schemeClr val="accent1"/>
+          </a:fillRef>
+          <a:effectRef idx="2">
+            <a:schemeClr val="accent1"/>
+          </a:effectRef>
+          <a:fontRef idx="minor">
+            <a:schemeClr val="lt1"/>
+          </a:fontRef>
+        </p:style>
+        <p:txBody>
+          <a:bodyPr rtlCol="0" anchor="ctr"/>
+          <a:lstStyle/>
+          <a:p>
+            <a:pPr algn="ctr"/>
+          </a:p>
+        </p:txBody>
+      </p:sp>
+      <p:sp>
+        <p:nvSpPr>
+          <p:cNvPr id="14" name="TextBox 13"/>
+          <p:cNvSpPr txBox="1"/>
+          <p:nvPr/>
+        </p:nvSpPr>
+        <p:spPr>
+          <a:xfrm>
+            <a:off x="8313724" y="2560320"/>
+            <a:ext cx="2899562" cy="640080"/>
+          </a:xfrm>
+          <a:prstGeom prst="rect">
+            <a:avLst/>
+          </a:prstGeom>
+          <a:noFill/>
+        </p:spPr>
+        <p:txBody>
+          <a:bodyPr wrap="square" lIns="0" rIns="0" tIns="0" bIns="0" anchor="t">
+            <a:spAutoFit/>
+          </a:bodyPr>
+          <a:lstStyle/>
+          <a:p>
+            <a:pPr algn="l">
+              <a:lnSpc>
+                <a:spcPct val="105000"/>
+              </a:lnSpc>
+              <a:spcAft>
+                <a:spcPts val="200"/>
+              </a:spcAft>
+            </a:pPr>
+            <a:r>
+              <a:rPr sz="1800" b="1" i="0">
+                <a:solidFill>
+                  <a:srgbClr val="1F2937"/>
+                </a:solidFill>
+                <a:latin typeface="Calibri"/>
+              </a:rPr>
+              <a:t>Designing for a task you cannot grade</a:t>
+            </a:r>
+          </a:p>
+        </p:txBody>
+      </p:sp>
+      <p:sp>
+        <p:nvSpPr>
+          <p:cNvPr id="15" name="TextBox 14"/>
+          <p:cNvSpPr txBox="1"/>
+          <p:nvPr/>
+        </p:nvSpPr>
+        <p:spPr>
+          <a:xfrm>
+            <a:off x="8313724" y="3246120"/>
+            <a:ext cx="2899562" cy="1737360"/>
+          </a:xfrm>
+          <a:prstGeom prst="rect">
+            <a:avLst/>
+          </a:prstGeom>
+          <a:noFill/>
+        </p:spPr>
+        <p:txBody>
+          <a:bodyPr wrap="square" lIns="0" rIns="0" tIns="0" bIns="0" anchor="t">
+            <a:spAutoFit/>
+          </a:bodyPr>
+          <a:lstStyle/>
+          <a:p>
+            <a:pPr algn="l">
+              <a:lnSpc>
+                <a:spcPct val="105000"/>
+              </a:lnSpc>
+              <a:spcAft>
+                <a:spcPts val="200"/>
+              </a:spcAft>
+            </a:pPr>
+            <a:r>
+              <a:rPr sz="1350" b="0" i="0">
+                <a:solidFill>
+                  <a:srgbClr val="333D4B"/>
+                </a:solidFill>
+                <a:latin typeface="Calibri"/>
+              </a:rPr>
+              <a:t>If you cannot tell whether the output is right, you cannot build this responsibly, however good the tool is. Pick something where you are the expert.</a:t>
+            </a:r>
+          </a:p>
+        </p:txBody>
+      </p:sp>
+      <p:sp>
+        <p:nvSpPr>
+          <p:cNvPr id="16" name="TextBox 15"/>
+          <p:cNvSpPr txBox="1"/>
+          <p:nvPr/>
+        </p:nvSpPr>
+        <p:spPr>
+          <a:xfrm>
+            <a:off x="777240" y="6355080"/>
+            <a:ext cx="10637215" cy="274320"/>
+          </a:xfrm>
+          <a:prstGeom prst="rect">
+            <a:avLst/>
+          </a:prstGeom>
+          <a:noFill/>
+        </p:spPr>
+        <p:txBody>
           <a:bodyPr wrap="square" lIns="0" rIns="0" tIns="0" bIns="0">
             <a:spAutoFit/>
           </a:bodyPr>
           <a:lstStyle/>
           <a:p>
             <a:r>
-              <a:rPr sz="3400" b="1" i="0">
-                <a:solidFill>
-                  <a:srgbClr val="1F2937"/>
-                </a:solidFill>
-                <a:latin typeface="Calibri Light"/>
-              </a:rPr>
-              <a:t>Build</a:t>
+              <a:rPr sz="1000" b="0" i="0">
+                <a:solidFill>
+                  <a:srgbClr val="6B7787"/>
+                </a:solidFill>
+                <a:latin typeface="Calibri"/>
+              </a:rPr>
+              <a:t>Week 10  ·  Prompt Engineering and Large Language Models</a:t>
+            </a:r>
+          </a:p>
+        </p:txBody>
+      </p:sp>
+      <p:sp>
+        <p:nvSpPr>
+          <p:cNvPr id="17" name="TextBox 16"/>
+          <p:cNvSpPr txBox="1"/>
+          <p:nvPr/>
+        </p:nvSpPr>
+        <p:spPr>
+          <a:xfrm>
+            <a:off x="10500055" y="6355080"/>
+            <a:ext cx="914400" cy="274320"/>
+          </a:xfrm>
+          <a:prstGeom prst="rect">
+            <a:avLst/>
+          </a:prstGeom>
+          <a:noFill/>
+        </p:spPr>
+        <p:txBody>
+          <a:bodyPr wrap="square" lIns="0" rIns="0" tIns="0" bIns="0">
+            <a:spAutoFit/>
+          </a:bodyPr>
+          <a:lstStyle/>
+          <a:p>
+            <a:pPr algn="r"/>
+            <a:r>
+              <a:rPr sz="1000" b="0" i="0">
+                <a:solidFill>
+                  <a:srgbClr val="6B7787"/>
+                </a:solidFill>
+                <a:latin typeface="Calibri"/>
+              </a:rPr>
+              <a:t>10</a:t>
             </a:r>
           </a:p>
         </p:txBody>
@@ -5740,7 +6763,7 @@
         <p:spPr>
           <a:xfrm>
             <a:off x="777240" y="566928"/>
-            <a:ext cx="10637215" cy="365760"/>
+            <a:ext cx="10637215" cy="822960"/>
           </a:xfrm>
           <a:prstGeom prst="rect">
             <a:avLst/>
@@ -5754,67 +6777,33 @@
           <a:lstStyle/>
           <a:p>
             <a:r>
-              <a:rPr sz="1300" b="1" i="0">
-                <a:solidFill>
-                  <a:srgbClr val="B45309"/>
-                </a:solidFill>
-                <a:latin typeface="Calibri"/>
-              </a:rPr>
-              <a:t>IN-CLASS ACTIVITY  ·  20 MINUTES</a:t>
-            </a:r>
-          </a:p>
-        </p:txBody>
-      </p:sp>
-      <p:sp>
-        <p:nvSpPr>
-          <p:cNvPr id="3" name="TextBox 2"/>
-          <p:cNvSpPr txBox="1"/>
-          <p:nvPr/>
-        </p:nvSpPr>
-        <p:spPr>
-          <a:xfrm>
-            <a:off x="777240" y="960120"/>
-            <a:ext cx="10637215" cy="731520"/>
-          </a:xfrm>
-          <a:prstGeom prst="rect">
-            <a:avLst/>
-          </a:prstGeom>
-          <a:noFill/>
-        </p:spPr>
-        <p:txBody>
-          <a:bodyPr wrap="square" lIns="0" rIns="0" tIns="0" bIns="0">
-            <a:spAutoFit/>
-          </a:bodyPr>
-          <a:lstStyle/>
-          <a:p>
-            <a:r>
               <a:rPr sz="3000" b="1" i="0">
                 <a:solidFill>
                   <a:srgbClr val="1F2937"/>
                 </a:solidFill>
                 <a:latin typeface="Calibri Light"/>
               </a:rPr>
-              <a:t>Your Field Build</a:t>
-            </a:r>
-          </a:p>
-        </p:txBody>
-      </p:sp>
-      <p:sp>
-        <p:nvSpPr>
-          <p:cNvPr id="4" name="Rectangle 3"/>
+              <a:t>When There Are No Documents</a:t>
+            </a:r>
+          </a:p>
+        </p:txBody>
+      </p:sp>
+      <p:sp>
+        <p:nvSpPr>
+          <p:cNvPr id="3" name="Rectangle 2"/>
           <p:cNvSpPr/>
           <p:nvPr/>
         </p:nvSpPr>
         <p:spPr>
           <a:xfrm>
-            <a:off x="777240" y="1783080"/>
+            <a:off x="777240" y="1417320"/>
             <a:ext cx="1051560" cy="38100"/>
           </a:xfrm>
           <a:prstGeom prst="rect">
             <a:avLst/>
           </a:prstGeom>
           <a:solidFill>
-            <a:srgbClr val="B45309"/>
+            <a:srgbClr val="0F766E"/>
           </a:solidFill>
           <a:ln>
             <a:noFill/>
@@ -5845,14 +6834,14 @@
       </p:sp>
       <p:sp>
         <p:nvSpPr>
-          <p:cNvPr id="5" name="TextBox 4"/>
+          <p:cNvPr id="4" name="TextBox 3"/>
           <p:cNvSpPr txBox="1"/>
           <p:nvPr/>
         </p:nvSpPr>
         <p:spPr>
           <a:xfrm>
-            <a:off x="777240" y="2148840"/>
-            <a:ext cx="10637215" cy="3931920"/>
+            <a:off x="777240" y="1783080"/>
+            <a:ext cx="10637215" cy="4343400"/>
           </a:xfrm>
           <a:prstGeom prst="rect">
             <a:avLst/>
@@ -5874,14 +6863,24 @@
               </a:spcAft>
             </a:pPr>
             <a:r>
-              <a:rPr sz="1900" b="1" i="0">
+              <a:rPr sz="1900" b="0" i="0">
                 <a:solidFill>
                   <a:srgbClr val="1F2937"/>
                 </a:solidFill>
                 <a:latin typeface="Calibri"/>
               </a:rPr>
-              <a:t>•  1.  Fill the worksheet. All six questions. Ten minutes.</a:t>
-            </a:r>
+              <a:t>•  A common finding at question 2 — and it is a finding, not a failure</a:t>
+            </a:r>
+          </a:p>
+          <a:p>
+            <a:pPr>
+              <a:lnSpc>
+                <a:spcPct val="115000"/>
+              </a:lnSpc>
+              <a:spcAft>
+                <a:spcPts val="1000"/>
+              </a:spcAft>
+            </a:pPr>
           </a:p>
           <a:p>
             <a:pPr lvl="1">
@@ -5899,7 +6898,26 @@
                 </a:solidFill>
                 <a:latin typeface="Calibri"/>
               </a:rPr>
-              <a:t>—  Write it down. Everyone finishes this part — it needs no tool and no account.</a:t>
+              <a:t>—  If the knowledge lives only in people's heads, grounding has nothing to work with</a:t>
+            </a:r>
+          </a:p>
+          <a:p>
+            <a:pPr lvl="1">
+              <a:lnSpc>
+                <a:spcPct val="115000"/>
+              </a:lnSpc>
+              <a:spcAft>
+                <a:spcPts val="500"/>
+              </a:spcAft>
+            </a:pPr>
+            <a:r>
+              <a:rPr sz="1600" b="0" i="0">
+                <a:solidFill>
+                  <a:srgbClr val="333D4B"/>
+                </a:solidFill>
+                <a:latin typeface="Calibri"/>
+              </a:rPr>
+              <a:t>—  The honest options: write the knowledge down first, or design something that does not need it</a:t>
             </a:r>
           </a:p>
           <a:p>
@@ -5911,6 +6929,16 @@
                 <a:spcPts val="1000"/>
               </a:spcAft>
             </a:pPr>
+          </a:p>
+          <a:p>
+            <a:pPr>
+              <a:lnSpc>
+                <a:spcPct val="115000"/>
+              </a:lnSpc>
+              <a:spcAft>
+                <a:spcPts val="1000"/>
+              </a:spcAft>
+            </a:pPr>
             <a:r>
               <a:rPr sz="1900" b="1" i="0">
                 <a:solidFill>
@@ -5918,7 +6946,7 @@
                 </a:solidFill>
                 <a:latin typeface="Calibri"/>
               </a:rPr>
-              <a:t>•  2.  Check it against the good-candidate list.</a:t>
+              <a:t>•  Often the most valuable outcome of this worksheet:</a:t>
             </a:r>
           </a:p>
           <a:p>
@@ -5937,26 +6965,7 @@
                 </a:solidFill>
                 <a:latin typeface="Calibri"/>
               </a:rPr>
-              <a:t>—  If it fails on scope, cut it in half and fill the worksheet again.</a:t>
-            </a:r>
-          </a:p>
-          <a:p>
-            <a:pPr>
-              <a:lnSpc>
-                <a:spcPct val="115000"/>
-              </a:lnSpc>
-              <a:spcAft>
-                <a:spcPts val="1000"/>
-              </a:spcAft>
-            </a:pPr>
-            <a:r>
-              <a:rPr sz="1900" b="1" i="0">
-                <a:solidFill>
-                  <a:srgbClr val="1F2937"/>
-                </a:solidFill>
-                <a:latin typeface="Calibri"/>
-              </a:rPr>
-              <a:t>•  3.  Then build as far as you get in the remaining ten minutes.</a:t>
+              <a:t>—  Discovering that your institution has never written down how something is actually done</a:t>
             </a:r>
           </a:p>
           <a:p>
@@ -5975,43 +6984,14 @@
                 </a:solidFill>
                 <a:latin typeface="Calibri"/>
               </a:rPr>
-              <a:t>—  Ground it, or make the tool, or write the three steps out. Any progress is fine.</a:t>
-            </a:r>
-          </a:p>
-          <a:p>
-            <a:pPr>
-              <a:lnSpc>
-                <a:spcPct val="115000"/>
-              </a:lnSpc>
-              <a:spcAft>
-                <a:spcPts val="1000"/>
-              </a:spcAft>
-            </a:pPr>
-          </a:p>
-          <a:p>
-            <a:pPr>
-              <a:lnSpc>
-                <a:spcPct val="115000"/>
-              </a:lnSpc>
-              <a:spcAft>
-                <a:spcPts val="1000"/>
-              </a:spcAft>
-            </a:pPr>
-            <a:r>
-              <a:rPr sz="1900" b="1" i="0">
-                <a:solidFill>
-                  <a:srgbClr val="1F2937"/>
-                </a:solidFill>
-                <a:latin typeface="Calibri"/>
-              </a:rPr>
-              <a:t>•  The worksheet is the deliverable. The working system is a bonus.</a:t>
-            </a:r>
-          </a:p>
-        </p:txBody>
-      </p:sp>
-      <p:sp>
-        <p:nvSpPr>
-          <p:cNvPr id="6" name="TextBox 5"/>
+              <a:t>—  That document is worth more than the assistant would have been — and the assistant becomes possible afterwards</a:t>
+            </a:r>
+          </a:p>
+        </p:txBody>
+      </p:sp>
+      <p:sp>
+        <p:nvSpPr>
+          <p:cNvPr id="5" name="TextBox 4"/>
           <p:cNvSpPr txBox="1"/>
           <p:nvPr/>
         </p:nvSpPr>
@@ -6045,7 +7025,7 @@
       </p:sp>
       <p:sp>
         <p:nvSpPr>
-          <p:cNvPr id="7" name="TextBox 6"/>
+          <p:cNvPr id="6" name="TextBox 5"/>
           <p:cNvSpPr txBox="1"/>
           <p:nvPr/>
         </p:nvSpPr>
@@ -6125,7 +7105,7 @@
                 </a:solidFill>
                 <a:latin typeface="Calibri Light"/>
               </a:rPr>
-              <a:t>The Two Questions People Get Wrong</a:t>
+              <a:t>Good Candidates and Bad Ones</a:t>
             </a:r>
           </a:p>
         </p:txBody>
@@ -6176,14 +7156,106 @@
       </p:sp>
       <p:sp>
         <p:nvSpPr>
-          <p:cNvPr id="4" name="TextBox 3"/>
+          <p:cNvPr id="4" name="Rounded Rectangle 3"/>
+          <p:cNvSpPr/>
+          <p:nvPr/>
+        </p:nvSpPr>
+        <p:spPr>
+          <a:xfrm>
+            <a:off x="777240" y="2057400"/>
+            <a:ext cx="3301898" cy="3200400"/>
+          </a:xfrm>
+          <a:prstGeom prst="roundRect">
+            <a:avLst>
+              <a:gd name="adj" fmla="val 10000"/>
+            </a:avLst>
+          </a:prstGeom>
+          <a:solidFill>
+            <a:srgbClr val="F1F5F9"/>
+          </a:solidFill>
+          <a:ln w="15875">
+            <a:solidFill>
+              <a:srgbClr val="D3DDE6"/>
+            </a:solidFill>
+          </a:ln>
+          <a:effectLst/>
+        </p:spPr>
+        <p:style>
+          <a:lnRef idx="1">
+            <a:schemeClr val="accent1"/>
+          </a:lnRef>
+          <a:fillRef idx="3">
+            <a:schemeClr val="accent1"/>
+          </a:fillRef>
+          <a:effectRef idx="2">
+            <a:schemeClr val="accent1"/>
+          </a:effectRef>
+          <a:fontRef idx="minor">
+            <a:schemeClr val="lt1"/>
+          </a:fontRef>
+        </p:style>
+        <p:txBody>
+          <a:bodyPr rtlCol="0" anchor="ctr"/>
+          <a:lstStyle/>
+          <a:p>
+            <a:pPr algn="ctr"/>
+          </a:p>
+        </p:txBody>
+      </p:sp>
+      <p:sp>
+        <p:nvSpPr>
+          <p:cNvPr id="5" name="Rectangle 4"/>
+          <p:cNvSpPr/>
+          <p:nvPr/>
+        </p:nvSpPr>
+        <p:spPr>
+          <a:xfrm>
+            <a:off x="978408" y="2331720"/>
+            <a:ext cx="640080" cy="38100"/>
+          </a:xfrm>
+          <a:prstGeom prst="rect">
+            <a:avLst/>
+          </a:prstGeom>
+          <a:solidFill>
+            <a:srgbClr val="0F766E"/>
+          </a:solidFill>
+          <a:ln>
+            <a:noFill/>
+          </a:ln>
+          <a:effectLst/>
+        </p:spPr>
+        <p:style>
+          <a:lnRef idx="1">
+            <a:schemeClr val="accent1"/>
+          </a:lnRef>
+          <a:fillRef idx="3">
+            <a:schemeClr val="accent1"/>
+          </a:fillRef>
+          <a:effectRef idx="2">
+            <a:schemeClr val="accent1"/>
+          </a:effectRef>
+          <a:fontRef idx="minor">
+            <a:schemeClr val="lt1"/>
+          </a:fontRef>
+        </p:style>
+        <p:txBody>
+          <a:bodyPr rtlCol="0" anchor="ctr"/>
+          <a:lstStyle/>
+          <a:p>
+            <a:pPr algn="ctr"/>
+          </a:p>
+        </p:txBody>
+      </p:sp>
+      <p:sp>
+        <p:nvSpPr>
+          <p:cNvPr id="6" name="TextBox 5"/>
           <p:cNvSpPr txBox="1"/>
           <p:nvPr/>
         </p:nvSpPr>
         <p:spPr>
           <a:xfrm>
-            <a:off x="777240" y="1783080"/>
-            <a:ext cx="10637215" cy="4343400"/>
+            <a:off x="978408" y="2560320"/>
+            <a:ext cx="2899562" cy="640080"/>
           </a:xfrm>
           <a:prstGeom prst="rect">
             <a:avLst/>
@@ -6191,175 +7263,41 @@
           <a:noFill/>
         </p:spPr>
         <p:txBody>
-          <a:bodyPr wrap="square" lIns="0" rIns="0" tIns="0" bIns="0">
+          <a:bodyPr wrap="square" lIns="0" rIns="0" tIns="0" bIns="0" anchor="t">
             <a:spAutoFit/>
           </a:bodyPr>
           <a:lstStyle/>
           <a:p>
-            <a:pPr>
+            <a:pPr algn="l">
               <a:lnSpc>
-                <a:spcPct val="115000"/>
+                <a:spcPct val="105000"/>
               </a:lnSpc>
               <a:spcAft>
-                <a:spcPts val="1000"/>
+                <a:spcPts val="200"/>
               </a:spcAft>
             </a:pPr>
             <a:r>
-              <a:rPr sz="1900" b="1" i="0">
+              <a:rPr sz="1800" b="1" i="0">
                 <a:solidFill>
                   <a:srgbClr val="1F2937"/>
                 </a:solidFill>
                 <a:latin typeface="Calibri"/>
               </a:rPr>
-              <a:t>•  Question 3 — the steps.</a:t>
-            </a:r>
-          </a:p>
-          <a:p>
-            <a:pPr lvl="1">
-              <a:lnSpc>
-                <a:spcPct val="115000"/>
-              </a:lnSpc>
-              <a:spcAft>
-                <a:spcPts val="500"/>
-              </a:spcAft>
-            </a:pPr>
-            <a:r>
-              <a:rPr sz="1600" b="0" i="0">
-                <a:solidFill>
-                  <a:srgbClr val="333D4B"/>
-                </a:solidFill>
-                <a:latin typeface="Calibri"/>
-              </a:rPr>
-              <a:t>—  Most first drafts have five or six steps. Almost all of them collapse to two or three.</a:t>
-            </a:r>
-          </a:p>
-          <a:p>
-            <a:pPr lvl="1">
-              <a:lnSpc>
-                <a:spcPct val="115000"/>
-              </a:lnSpc>
-              <a:spcAft>
-                <a:spcPts val="500"/>
-              </a:spcAft>
-            </a:pPr>
-            <a:r>
-              <a:rPr sz="1600" b="0" i="0">
-                <a:solidFill>
-                  <a:srgbClr val="333D4B"/>
-                </a:solidFill>
-                <a:latin typeface="Calibri"/>
-              </a:rPr>
-              <a:t>—  "Read the document" and "find the relevant part" are not two steps. They are one.</a:t>
-            </a:r>
-          </a:p>
-          <a:p>
-            <a:pPr>
-              <a:lnSpc>
-                <a:spcPct val="115000"/>
-              </a:lnSpc>
-              <a:spcAft>
-                <a:spcPts val="1000"/>
-              </a:spcAft>
-            </a:pPr>
-          </a:p>
-          <a:p>
-            <a:pPr>
-              <a:lnSpc>
-                <a:spcPct val="115000"/>
-              </a:lnSpc>
-              <a:spcAft>
-                <a:spcPts val="1000"/>
-              </a:spcAft>
-            </a:pPr>
-            <a:r>
-              <a:rPr sz="1900" b="1" i="0">
-                <a:solidFill>
-                  <a:srgbClr val="1F2937"/>
-                </a:solidFill>
-                <a:latin typeface="Calibri"/>
-              </a:rPr>
-              <a:t>•  Question 6 — who is harmed.</a:t>
-            </a:r>
-          </a:p>
-          <a:p>
-            <a:pPr lvl="1">
-              <a:lnSpc>
-                <a:spcPct val="115000"/>
-              </a:lnSpc>
-              <a:spcAft>
-                <a:spcPts val="500"/>
-              </a:spcAft>
-            </a:pPr>
-            <a:r>
-              <a:rPr sz="1600" b="0" i="0">
-                <a:solidFill>
-                  <a:srgbClr val="333D4B"/>
-                </a:solidFill>
-                <a:latin typeface="Calibri"/>
-              </a:rPr>
-              <a:t>—  "Users could get wrong information" is not an answer. It is a way of not answering.</a:t>
-            </a:r>
-          </a:p>
-          <a:p>
-            <a:pPr lvl="1">
-              <a:lnSpc>
-                <a:spcPct val="115000"/>
-              </a:lnSpc>
-              <a:spcAft>
-                <a:spcPts val="500"/>
-              </a:spcAft>
-            </a:pPr>
-            <a:r>
-              <a:rPr sz="1600" b="0" i="0">
-                <a:solidFill>
-                  <a:srgbClr val="333D4B"/>
-                </a:solidFill>
-                <a:latin typeface="Calibri"/>
-              </a:rPr>
-              <a:t>—  "A student misses a resit because they were told the wrong date" is an answer — and it changes the design.</a:t>
-            </a:r>
-          </a:p>
-          <a:p>
-            <a:pPr>
-              <a:lnSpc>
-                <a:spcPct val="115000"/>
-              </a:lnSpc>
-              <a:spcAft>
-                <a:spcPts val="1000"/>
-              </a:spcAft>
-            </a:pPr>
-          </a:p>
-          <a:p>
-            <a:pPr lvl="1">
-              <a:lnSpc>
-                <a:spcPct val="115000"/>
-              </a:lnSpc>
-              <a:spcAft>
-                <a:spcPts val="500"/>
-              </a:spcAft>
-            </a:pPr>
-            <a:r>
-              <a:rPr sz="1600" b="0" i="0">
-                <a:solidFill>
-                  <a:srgbClr val="333D4B"/>
-                </a:solidFill>
-                <a:latin typeface="Calibri"/>
-              </a:rPr>
-              <a:t>—  Naming a specific person is the single most useful thing on the worksheet.</a:t>
-            </a:r>
-          </a:p>
-        </p:txBody>
-      </p:sp>
-      <p:sp>
-        <p:nvSpPr>
-          <p:cNvPr id="5" name="TextBox 4"/>
+              <a:t>Good</a:t>
+            </a:r>
+          </a:p>
+        </p:txBody>
+      </p:sp>
+      <p:sp>
+        <p:nvSpPr>
+          <p:cNvPr id="7" name="TextBox 6"/>
           <p:cNvSpPr txBox="1"/>
           <p:nvPr/>
         </p:nvSpPr>
         <p:spPr>
           <a:xfrm>
-            <a:off x="777240" y="6355080"/>
-            <a:ext cx="10637215" cy="274320"/>
+            <a:off x="978408" y="3246120"/>
+            <a:ext cx="2899562" cy="1737360"/>
           </a:xfrm>
           <a:prstGeom prst="rect">
             <a:avLst/>
@@ -6367,6 +7305,400 @@
           <a:noFill/>
         </p:spPr>
         <p:txBody>
+          <a:bodyPr wrap="square" lIns="0" rIns="0" tIns="0" bIns="0" anchor="t">
+            <a:spAutoFit/>
+          </a:bodyPr>
+          <a:lstStyle/>
+          <a:p>
+            <a:pPr algn="l">
+              <a:lnSpc>
+                <a:spcPct val="105000"/>
+              </a:lnSpc>
+              <a:spcAft>
+                <a:spcPts val="200"/>
+              </a:spcAft>
+            </a:pPr>
+            <a:r>
+              <a:rPr sz="1350" b="0" i="0">
+                <a:solidFill>
+                  <a:srgbClr val="333D4B"/>
+                </a:solidFill>
+                <a:latin typeface="Calibri"/>
+              </a:rPr>
+              <a:t>Repetitive. The answer exists in a document you can point at. A wrong answer is recoverable. Delay harms nobody. You personally understand the task well enough to grade the output.</a:t>
+            </a:r>
+          </a:p>
+        </p:txBody>
+      </p:sp>
+      <p:sp>
+        <p:nvSpPr>
+          <p:cNvPr id="8" name="Rounded Rectangle 7"/>
+          <p:cNvSpPr/>
+          <p:nvPr/>
+        </p:nvSpPr>
+        <p:spPr>
+          <a:xfrm>
+            <a:off x="4444898" y="2057400"/>
+            <a:ext cx="3301898" cy="3200400"/>
+          </a:xfrm>
+          <a:prstGeom prst="roundRect">
+            <a:avLst>
+              <a:gd name="adj" fmla="val 10000"/>
+            </a:avLst>
+          </a:prstGeom>
+          <a:solidFill>
+            <a:srgbClr val="F1F5F9"/>
+          </a:solidFill>
+          <a:ln w="15875">
+            <a:solidFill>
+              <a:srgbClr val="D3DDE6"/>
+            </a:solidFill>
+          </a:ln>
+          <a:effectLst/>
+        </p:spPr>
+        <p:style>
+          <a:lnRef idx="1">
+            <a:schemeClr val="accent1"/>
+          </a:lnRef>
+          <a:fillRef idx="3">
+            <a:schemeClr val="accent1"/>
+          </a:fillRef>
+          <a:effectRef idx="2">
+            <a:schemeClr val="accent1"/>
+          </a:effectRef>
+          <a:fontRef idx="minor">
+            <a:schemeClr val="lt1"/>
+          </a:fontRef>
+        </p:style>
+        <p:txBody>
+          <a:bodyPr rtlCol="0" anchor="ctr"/>
+          <a:lstStyle/>
+          <a:p>
+            <a:pPr algn="ctr"/>
+          </a:p>
+        </p:txBody>
+      </p:sp>
+      <p:sp>
+        <p:nvSpPr>
+          <p:cNvPr id="9" name="Rectangle 8"/>
+          <p:cNvSpPr/>
+          <p:nvPr/>
+        </p:nvSpPr>
+        <p:spPr>
+          <a:xfrm>
+            <a:off x="4646066" y="2331720"/>
+            <a:ext cx="640080" cy="38100"/>
+          </a:xfrm>
+          <a:prstGeom prst="rect">
+            <a:avLst/>
+          </a:prstGeom>
+          <a:solidFill>
+            <a:srgbClr val="0F766E"/>
+          </a:solidFill>
+          <a:ln>
+            <a:noFill/>
+          </a:ln>
+          <a:effectLst/>
+        </p:spPr>
+        <p:style>
+          <a:lnRef idx="1">
+            <a:schemeClr val="accent1"/>
+          </a:lnRef>
+          <a:fillRef idx="3">
+            <a:schemeClr val="accent1"/>
+          </a:fillRef>
+          <a:effectRef idx="2">
+            <a:schemeClr val="accent1"/>
+          </a:effectRef>
+          <a:fontRef idx="minor">
+            <a:schemeClr val="lt1"/>
+          </a:fontRef>
+        </p:style>
+        <p:txBody>
+          <a:bodyPr rtlCol="0" anchor="ctr"/>
+          <a:lstStyle/>
+          <a:p>
+            <a:pPr algn="ctr"/>
+          </a:p>
+        </p:txBody>
+      </p:sp>
+      <p:sp>
+        <p:nvSpPr>
+          <p:cNvPr id="10" name="TextBox 9"/>
+          <p:cNvSpPr txBox="1"/>
+          <p:nvPr/>
+        </p:nvSpPr>
+        <p:spPr>
+          <a:xfrm>
+            <a:off x="4646066" y="2560320"/>
+            <a:ext cx="2899562" cy="640080"/>
+          </a:xfrm>
+          <a:prstGeom prst="rect">
+            <a:avLst/>
+          </a:prstGeom>
+          <a:noFill/>
+        </p:spPr>
+        <p:txBody>
+          <a:bodyPr wrap="square" lIns="0" rIns="0" tIns="0" bIns="0" anchor="t">
+            <a:spAutoFit/>
+          </a:bodyPr>
+          <a:lstStyle/>
+          <a:p>
+            <a:pPr algn="l">
+              <a:lnSpc>
+                <a:spcPct val="105000"/>
+              </a:lnSpc>
+              <a:spcAft>
+                <a:spcPts val="200"/>
+              </a:spcAft>
+            </a:pPr>
+            <a:r>
+              <a:rPr sz="1800" b="1" i="0">
+                <a:solidFill>
+                  <a:srgbClr val="1F2937"/>
+                </a:solidFill>
+                <a:latin typeface="Calibri"/>
+              </a:rPr>
+              <a:t>Bad</a:t>
+            </a:r>
+          </a:p>
+        </p:txBody>
+      </p:sp>
+      <p:sp>
+        <p:nvSpPr>
+          <p:cNvPr id="11" name="TextBox 10"/>
+          <p:cNvSpPr txBox="1"/>
+          <p:nvPr/>
+        </p:nvSpPr>
+        <p:spPr>
+          <a:xfrm>
+            <a:off x="4646066" y="3246120"/>
+            <a:ext cx="2899562" cy="1737360"/>
+          </a:xfrm>
+          <a:prstGeom prst="rect">
+            <a:avLst/>
+          </a:prstGeom>
+          <a:noFill/>
+        </p:spPr>
+        <p:txBody>
+          <a:bodyPr wrap="square" lIns="0" rIns="0" tIns="0" bIns="0" anchor="t">
+            <a:spAutoFit/>
+          </a:bodyPr>
+          <a:lstStyle/>
+          <a:p>
+            <a:pPr algn="l">
+              <a:lnSpc>
+                <a:spcPct val="105000"/>
+              </a:lnSpc>
+              <a:spcAft>
+                <a:spcPts val="200"/>
+              </a:spcAft>
+            </a:pPr>
+            <a:r>
+              <a:rPr sz="1350" b="0" i="0">
+                <a:solidFill>
+                  <a:srgbClr val="333D4B"/>
+                </a:solidFill>
+                <a:latin typeface="Calibri"/>
+              </a:rPr>
+              <a:t>Requires judgment you cannot specify. The answer is not written down anywhere. A wrong answer reaches a patient, client or grade directly. Needs personal data to be useful at all.</a:t>
+            </a:r>
+          </a:p>
+        </p:txBody>
+      </p:sp>
+      <p:sp>
+        <p:nvSpPr>
+          <p:cNvPr id="12" name="Rounded Rectangle 11"/>
+          <p:cNvSpPr/>
+          <p:nvPr/>
+        </p:nvSpPr>
+        <p:spPr>
+          <a:xfrm>
+            <a:off x="8112556" y="2057400"/>
+            <a:ext cx="3301898" cy="3200400"/>
+          </a:xfrm>
+          <a:prstGeom prst="roundRect">
+            <a:avLst>
+              <a:gd name="adj" fmla="val 10000"/>
+            </a:avLst>
+          </a:prstGeom>
+          <a:solidFill>
+            <a:srgbClr val="F1F5F9"/>
+          </a:solidFill>
+          <a:ln w="15875">
+            <a:solidFill>
+              <a:srgbClr val="D3DDE6"/>
+            </a:solidFill>
+          </a:ln>
+          <a:effectLst/>
+        </p:spPr>
+        <p:style>
+          <a:lnRef idx="1">
+            <a:schemeClr val="accent1"/>
+          </a:lnRef>
+          <a:fillRef idx="3">
+            <a:schemeClr val="accent1"/>
+          </a:fillRef>
+          <a:effectRef idx="2">
+            <a:schemeClr val="accent1"/>
+          </a:effectRef>
+          <a:fontRef idx="minor">
+            <a:schemeClr val="lt1"/>
+          </a:fontRef>
+        </p:style>
+        <p:txBody>
+          <a:bodyPr rtlCol="0" anchor="ctr"/>
+          <a:lstStyle/>
+          <a:p>
+            <a:pPr algn="ctr"/>
+          </a:p>
+        </p:txBody>
+      </p:sp>
+      <p:sp>
+        <p:nvSpPr>
+          <p:cNvPr id="13" name="Rectangle 12"/>
+          <p:cNvSpPr/>
+          <p:nvPr/>
+        </p:nvSpPr>
+        <p:spPr>
+          <a:xfrm>
+            <a:off x="8313724" y="2331720"/>
+            <a:ext cx="640080" cy="38100"/>
+          </a:xfrm>
+          <a:prstGeom prst="rect">
+            <a:avLst/>
+          </a:prstGeom>
+          <a:solidFill>
+            <a:srgbClr val="0F766E"/>
+          </a:solidFill>
+          <a:ln>
+            <a:noFill/>
+          </a:ln>
+          <a:effectLst/>
+        </p:spPr>
+        <p:style>
+          <a:lnRef idx="1">
+            <a:schemeClr val="accent1"/>
+          </a:lnRef>
+          <a:fillRef idx="3">
+            <a:schemeClr val="accent1"/>
+          </a:fillRef>
+          <a:effectRef idx="2">
+            <a:schemeClr val="accent1"/>
+          </a:effectRef>
+          <a:fontRef idx="minor">
+            <a:schemeClr val="lt1"/>
+          </a:fontRef>
+        </p:style>
+        <p:txBody>
+          <a:bodyPr rtlCol="0" anchor="ctr"/>
+          <a:lstStyle/>
+          <a:p>
+            <a:pPr algn="ctr"/>
+          </a:p>
+        </p:txBody>
+      </p:sp>
+      <p:sp>
+        <p:nvSpPr>
+          <p:cNvPr id="14" name="TextBox 13"/>
+          <p:cNvSpPr txBox="1"/>
+          <p:nvPr/>
+        </p:nvSpPr>
+        <p:spPr>
+          <a:xfrm>
+            <a:off x="8313724" y="2560320"/>
+            <a:ext cx="2899562" cy="640080"/>
+          </a:xfrm>
+          <a:prstGeom prst="rect">
+            <a:avLst/>
+          </a:prstGeom>
+          <a:noFill/>
+        </p:spPr>
+        <p:txBody>
+          <a:bodyPr wrap="square" lIns="0" rIns="0" tIns="0" bIns="0" anchor="t">
+            <a:spAutoFit/>
+          </a:bodyPr>
+          <a:lstStyle/>
+          <a:p>
+            <a:pPr algn="l">
+              <a:lnSpc>
+                <a:spcPct val="105000"/>
+              </a:lnSpc>
+              <a:spcAft>
+                <a:spcPts val="200"/>
+              </a:spcAft>
+            </a:pPr>
+            <a:r>
+              <a:rPr sz="1800" b="1" i="0">
+                <a:solidFill>
+                  <a:srgbClr val="1F2937"/>
+                </a:solidFill>
+                <a:latin typeface="Calibri"/>
+              </a:rPr>
+              <a:t>The honest test</a:t>
+            </a:r>
+          </a:p>
+        </p:txBody>
+      </p:sp>
+      <p:sp>
+        <p:nvSpPr>
+          <p:cNvPr id="15" name="TextBox 14"/>
+          <p:cNvSpPr txBox="1"/>
+          <p:nvPr/>
+        </p:nvSpPr>
+        <p:spPr>
+          <a:xfrm>
+            <a:off x="8313724" y="3246120"/>
+            <a:ext cx="2899562" cy="1737360"/>
+          </a:xfrm>
+          <a:prstGeom prst="rect">
+            <a:avLst/>
+          </a:prstGeom>
+          <a:noFill/>
+        </p:spPr>
+        <p:txBody>
+          <a:bodyPr wrap="square" lIns="0" rIns="0" tIns="0" bIns="0" anchor="t">
+            <a:spAutoFit/>
+          </a:bodyPr>
+          <a:lstStyle/>
+          <a:p>
+            <a:pPr algn="l">
+              <a:lnSpc>
+                <a:spcPct val="105000"/>
+              </a:lnSpc>
+              <a:spcAft>
+                <a:spcPts val="200"/>
+              </a:spcAft>
+            </a:pPr>
+            <a:r>
+              <a:rPr sz="1350" b="0" i="0">
+                <a:solidFill>
+                  <a:srgbClr val="333D4B"/>
+                </a:solidFill>
+                <a:latin typeface="Calibri"/>
+              </a:rPr>
+              <a:t>Would you be comfortable showing this to the person most affected by it, and explaining exactly how it works? If not, redesign it rather than hiding it.</a:t>
+            </a:r>
+          </a:p>
+        </p:txBody>
+      </p:sp>
+      <p:sp>
+        <p:nvSpPr>
+          <p:cNvPr id="16" name="TextBox 15"/>
+          <p:cNvSpPr txBox="1"/>
+          <p:nvPr/>
+        </p:nvSpPr>
+        <p:spPr>
+          <a:xfrm>
+            <a:off x="777240" y="6355080"/>
+            <a:ext cx="10637215" cy="274320"/>
+          </a:xfrm>
+          <a:prstGeom prst="rect">
+            <a:avLst/>
+          </a:prstGeom>
+          <a:noFill/>
+        </p:spPr>
+        <p:txBody>
           <a:bodyPr wrap="square" lIns="0" rIns="0" tIns="0" bIns="0">
             <a:spAutoFit/>
           </a:bodyPr>
@@ -6386,7 +7718,7 @@
       </p:sp>
       <p:sp>
         <p:nvSpPr>
-          <p:cNvPr id="6" name="TextBox 5"/>
+          <p:cNvPr id="17" name="TextBox 16"/>
           <p:cNvSpPr txBox="1"/>
           <p:nvPr/>
         </p:nvSpPr>
@@ -6439,48 +7771,14 @@
       <p:grpSpPr/>
       <p:sp>
         <p:nvSpPr>
-          <p:cNvPr id="2" name="TextBox 1"/>
-          <p:cNvSpPr txBox="1"/>
-          <p:nvPr/>
-        </p:nvSpPr>
-        <p:spPr>
-          <a:xfrm>
-            <a:off x="777240" y="566928"/>
-            <a:ext cx="10637215" cy="822960"/>
-          </a:xfrm>
-          <a:prstGeom prst="rect">
-            <a:avLst/>
-          </a:prstGeom>
-          <a:noFill/>
-        </p:spPr>
-        <p:txBody>
-          <a:bodyPr wrap="square" lIns="0" rIns="0" tIns="0" bIns="0">
-            <a:spAutoFit/>
-          </a:bodyPr>
-          <a:lstStyle/>
-          <a:p>
-            <a:r>
-              <a:rPr sz="3000" b="1" i="0">
-                <a:solidFill>
-                  <a:srgbClr val="1F2937"/>
-                </a:solidFill>
-                <a:latin typeface="Calibri Light"/>
-              </a:rPr>
-              <a:t>Concepts You Must Be Able to Define and Diagnose</a:t>
-            </a:r>
-          </a:p>
-        </p:txBody>
-      </p:sp>
-      <p:sp>
-        <p:nvSpPr>
-          <p:cNvPr id="3" name="Rectangle 2"/>
+          <p:cNvPr id="2" name="Rectangle 1"/>
           <p:cNvSpPr/>
           <p:nvPr/>
         </p:nvSpPr>
         <p:spPr>
           <a:xfrm>
-            <a:off x="777240" y="1417320"/>
-            <a:ext cx="1051560" cy="38100"/>
+            <a:off x="0" y="0"/>
+            <a:ext cx="292608" cy="6858000"/>
           </a:xfrm>
           <a:prstGeom prst="rect">
             <a:avLst/>
@@ -6517,58 +7815,14 @@
       </p:sp>
       <p:sp>
         <p:nvSpPr>
-          <p:cNvPr id="4" name="Rectangle 3"/>
-          <p:cNvSpPr/>
-          <p:nvPr/>
-        </p:nvSpPr>
-        <p:spPr>
-          <a:xfrm>
-            <a:off x="777240" y="1783080"/>
-            <a:ext cx="10637215" cy="4251960"/>
-          </a:xfrm>
-          <a:prstGeom prst="rect">
-            <a:avLst/>
-          </a:prstGeom>
-          <a:solidFill>
-            <a:srgbClr val="F1F5F9"/>
-          </a:solidFill>
-          <a:ln>
-            <a:noFill/>
-          </a:ln>
-          <a:effectLst/>
-        </p:spPr>
-        <p:style>
-          <a:lnRef idx="1">
-            <a:schemeClr val="accent1"/>
-          </a:lnRef>
-          <a:fillRef idx="3">
-            <a:schemeClr val="accent1"/>
-          </a:fillRef>
-          <a:effectRef idx="2">
-            <a:schemeClr val="accent1"/>
-          </a:effectRef>
-          <a:fontRef idx="minor">
-            <a:schemeClr val="lt1"/>
-          </a:fontRef>
-        </p:style>
-        <p:txBody>
-          <a:bodyPr rtlCol="0" anchor="ctr"/>
-          <a:lstStyle/>
-          <a:p>
-            <a:pPr algn="ctr"/>
-          </a:p>
-        </p:txBody>
-      </p:sp>
-      <p:sp>
-        <p:nvSpPr>
-          <p:cNvPr id="5" name="TextBox 4"/>
+          <p:cNvPr id="3" name="TextBox 2"/>
           <p:cNvSpPr txBox="1"/>
           <p:nvPr/>
         </p:nvSpPr>
         <p:spPr>
           <a:xfrm>
-            <a:off x="1188720" y="2103120"/>
-            <a:ext cx="9814255" cy="3611880"/>
+            <a:off x="1280160" y="2743200"/>
+            <a:ext cx="10058400" cy="457200"/>
           </a:xfrm>
           <a:prstGeom prst="rect">
             <a:avLst/>
@@ -6581,207 +7835,28 @@
           </a:bodyPr>
           <a:lstStyle/>
           <a:p>
-            <a:pPr>
-              <a:lnSpc>
-                <a:spcPct val="115000"/>
-              </a:lnSpc>
-              <a:spcAft>
-                <a:spcPts val="1000"/>
-              </a:spcAft>
-            </a:pPr>
-            <a:r>
-              <a:rPr sz="1900" b="1" i="0">
-                <a:solidFill>
-                  <a:srgbClr val="1F2937"/>
-                </a:solidFill>
-                <a:latin typeface="Calibri"/>
-              </a:rPr>
-              <a:t>•  The six design questions</a:t>
-            </a:r>
-          </a:p>
-          <a:p>
-            <a:pPr lvl="1">
-              <a:lnSpc>
-                <a:spcPct val="115000"/>
-              </a:lnSpc>
-              <a:spcAft>
-                <a:spcPts val="500"/>
-              </a:spcAft>
-            </a:pPr>
-            <a:r>
-              <a:rPr sz="1600" b="0" i="0">
-                <a:solidFill>
-                  <a:srgbClr val="333D4B"/>
-                </a:solidFill>
-                <a:latin typeface="Calibri"/>
-              </a:rPr>
-              <a:t>—  Task · sources · steps · human placement · how you would know it works · what could go wrong and to whom.</a:t>
-            </a:r>
-          </a:p>
-          <a:p>
-            <a:pPr>
-              <a:lnSpc>
-                <a:spcPct val="115000"/>
-              </a:lnSpc>
-              <a:spcAft>
-                <a:spcPts val="1000"/>
-              </a:spcAft>
-            </a:pPr>
-            <a:r>
-              <a:rPr sz="1900" b="1" i="0">
-                <a:solidFill>
-                  <a:srgbClr val="1F2937"/>
-                </a:solidFill>
-                <a:latin typeface="Calibri"/>
-              </a:rPr>
-              <a:t>•  Good candidate criteria</a:t>
-            </a:r>
-          </a:p>
-          <a:p>
-            <a:pPr lvl="1">
-              <a:lnSpc>
-                <a:spcPct val="115000"/>
-              </a:lnSpc>
-              <a:spcAft>
-                <a:spcPts val="500"/>
-              </a:spcAft>
-            </a:pPr>
-            <a:r>
-              <a:rPr sz="1600" b="0" i="0">
-                <a:solidFill>
-                  <a:srgbClr val="333D4B"/>
-                </a:solidFill>
-                <a:latin typeface="Calibri"/>
-              </a:rPr>
-              <a:t>—  Repetitive · answers exist in documents · wrong answers recoverable · delay harmless · you can grade the output.</a:t>
-            </a:r>
-          </a:p>
-          <a:p>
-            <a:pPr>
-              <a:lnSpc>
-                <a:spcPct val="115000"/>
-              </a:lnSpc>
-              <a:spcAft>
-                <a:spcPts val="1000"/>
-              </a:spcAft>
-            </a:pPr>
-            <a:r>
-              <a:rPr sz="1900" b="1" i="0">
-                <a:solidFill>
-                  <a:srgbClr val="1F2937"/>
-                </a:solidFill>
-                <a:latin typeface="Calibri"/>
-              </a:rPr>
-              <a:t>•  Constraint over capability</a:t>
-            </a:r>
-          </a:p>
-          <a:p>
-            <a:pPr lvl="1">
-              <a:lnSpc>
-                <a:spcPct val="115000"/>
-              </a:lnSpc>
-              <a:spcAft>
-                <a:spcPts val="500"/>
-              </a:spcAft>
-            </a:pPr>
-            <a:r>
-              <a:rPr sz="1600" b="0" i="0">
-                <a:solidFill>
-                  <a:srgbClr val="333D4B"/>
-                </a:solidFill>
-                <a:latin typeface="Calibri"/>
-              </a:rPr>
-              <a:t>—  In a good design most decisions are about what the system must not do. Capability is free; constraints are the engineering.</a:t>
-            </a:r>
-          </a:p>
-          <a:p>
-            <a:pPr>
-              <a:lnSpc>
-                <a:spcPct val="115000"/>
-              </a:lnSpc>
-              <a:spcAft>
-                <a:spcPts val="1000"/>
-              </a:spcAft>
-            </a:pPr>
-            <a:r>
-              <a:rPr sz="1900" b="1" i="0">
-                <a:solidFill>
-                  <a:srgbClr val="1F2937"/>
-                </a:solidFill>
-                <a:latin typeface="Calibri"/>
-              </a:rPr>
-              <a:t>•  Human placement</a:t>
-            </a:r>
-          </a:p>
-          <a:p>
-            <a:pPr lvl="1">
-              <a:lnSpc>
-                <a:spcPct val="115000"/>
-              </a:lnSpc>
-              <a:spcAft>
-                <a:spcPts val="500"/>
-              </a:spcAft>
-            </a:pPr>
-            <a:r>
-              <a:rPr sz="1600" b="0" i="0">
-                <a:solidFill>
-                  <a:srgbClr val="333D4B"/>
-                </a:solidFill>
-                <a:latin typeface="Calibri"/>
-              </a:rPr>
-              <a:t>—  The human goes before the irreversible action, not at the end of the process. Identify the irreversible step first.</a:t>
-            </a:r>
-          </a:p>
-          <a:p>
-            <a:pPr>
-              <a:lnSpc>
-                <a:spcPct val="115000"/>
-              </a:lnSpc>
-              <a:spcAft>
-                <a:spcPts val="1000"/>
-              </a:spcAft>
-            </a:pPr>
-            <a:r>
-              <a:rPr sz="1900" b="1" i="0">
-                <a:solidFill>
-                  <a:srgbClr val="1F2937"/>
-                </a:solidFill>
-                <a:latin typeface="Calibri"/>
-              </a:rPr>
-              <a:t>•  Naming the harmed person</a:t>
-            </a:r>
-          </a:p>
-          <a:p>
-            <a:pPr lvl="1">
-              <a:lnSpc>
-                <a:spcPct val="115000"/>
-              </a:lnSpc>
-              <a:spcAft>
-                <a:spcPts val="500"/>
-              </a:spcAft>
-            </a:pPr>
-            <a:r>
-              <a:rPr sz="1600" b="0" i="0">
-                <a:solidFill>
-                  <a:srgbClr val="333D4B"/>
-                </a:solidFill>
-                <a:latin typeface="Calibri"/>
-              </a:rPr>
-              <a:t>—  A specific person, not a category. Specificity changes the design; abstraction does not.</a:t>
-            </a:r>
-          </a:p>
-        </p:txBody>
-      </p:sp>
-      <p:sp>
-        <p:nvSpPr>
-          <p:cNvPr id="6" name="TextBox 5"/>
+            <a:r>
+              <a:rPr sz="1400" b="1" i="0">
+                <a:solidFill>
+                  <a:srgbClr val="0F766E"/>
+                </a:solidFill>
+                <a:latin typeface="Calibri"/>
+              </a:rPr>
+              <a:t>PART 3</a:t>
+            </a:r>
+          </a:p>
+        </p:txBody>
+      </p:sp>
+      <p:sp>
+        <p:nvSpPr>
+          <p:cNvPr id="4" name="TextBox 3"/>
           <p:cNvSpPr txBox="1"/>
           <p:nvPr/>
         </p:nvSpPr>
         <p:spPr>
           <a:xfrm>
-            <a:off x="777240" y="6355080"/>
-            <a:ext cx="10637215" cy="274320"/>
+            <a:off x="1280160" y="3200400"/>
+            <a:ext cx="10058400" cy="1097280"/>
           </a:xfrm>
           <a:prstGeom prst="rect">
             <a:avLst/>
@@ -6795,48 +7870,13 @@
           <a:lstStyle/>
           <a:p>
             <a:r>
-              <a:rPr sz="1000" b="0" i="0">
-                <a:solidFill>
-                  <a:srgbClr val="6B7787"/>
-                </a:solidFill>
-                <a:latin typeface="Calibri"/>
-              </a:rPr>
-              <a:t>Week 10  ·  Prompt Engineering and Large Language Models</a:t>
-            </a:r>
-          </a:p>
-        </p:txBody>
-      </p:sp>
-      <p:sp>
-        <p:nvSpPr>
-          <p:cNvPr id="7" name="TextBox 6"/>
-          <p:cNvSpPr txBox="1"/>
-          <p:nvPr/>
-        </p:nvSpPr>
-        <p:spPr>
-          <a:xfrm>
-            <a:off x="10500055" y="6355080"/>
-            <a:ext cx="914400" cy="274320"/>
-          </a:xfrm>
-          <a:prstGeom prst="rect">
-            <a:avLst/>
-          </a:prstGeom>
-          <a:noFill/>
-        </p:spPr>
-        <p:txBody>
-          <a:bodyPr wrap="square" lIns="0" rIns="0" tIns="0" bIns="0">
-            <a:spAutoFit/>
-          </a:bodyPr>
-          <a:lstStyle/>
-          <a:p>
-            <a:pPr algn="r"/>
-            <a:r>
-              <a:rPr sz="1000" b="0" i="0">
-                <a:solidFill>
-                  <a:srgbClr val="6B7787"/>
-                </a:solidFill>
-                <a:latin typeface="Calibri"/>
-              </a:rPr>
-              <a:t>13</a:t>
+              <a:rPr sz="3400" b="1" i="0">
+                <a:solidFill>
+                  <a:srgbClr val="1F2937"/>
+                </a:solidFill>
+                <a:latin typeface="Calibri Light"/>
+              </a:rPr>
+              <a:t>Build</a:t>
             </a:r>
           </a:p>
         </p:txBody>
@@ -6868,7 +7908,7 @@
         <p:spPr>
           <a:xfrm>
             <a:off x="777240" y="566928"/>
-            <a:ext cx="10637215" cy="822960"/>
+            <a:ext cx="10637215" cy="365760"/>
           </a:xfrm>
           <a:prstGeom prst="rect">
             <a:avLst/>
@@ -6882,33 +7922,67 @@
           <a:lstStyle/>
           <a:p>
             <a:r>
+              <a:rPr sz="1300" b="1" i="0">
+                <a:solidFill>
+                  <a:srgbClr val="B45309"/>
+                </a:solidFill>
+                <a:latin typeface="Calibri"/>
+              </a:rPr>
+              <a:t>IN-CLASS ACTIVITY  ·  20 MINUTES</a:t>
+            </a:r>
+          </a:p>
+        </p:txBody>
+      </p:sp>
+      <p:sp>
+        <p:nvSpPr>
+          <p:cNvPr id="3" name="TextBox 2"/>
+          <p:cNvSpPr txBox="1"/>
+          <p:nvPr/>
+        </p:nvSpPr>
+        <p:spPr>
+          <a:xfrm>
+            <a:off x="777240" y="960120"/>
+            <a:ext cx="10637215" cy="731520"/>
+          </a:xfrm>
+          <a:prstGeom prst="rect">
+            <a:avLst/>
+          </a:prstGeom>
+          <a:noFill/>
+        </p:spPr>
+        <p:txBody>
+          <a:bodyPr wrap="square" lIns="0" rIns="0" tIns="0" bIns="0">
+            <a:spAutoFit/>
+          </a:bodyPr>
+          <a:lstStyle/>
+          <a:p>
+            <a:r>
               <a:rPr sz="3000" b="1" i="0">
                 <a:solidFill>
                   <a:srgbClr val="1F2937"/>
                 </a:solidFill>
                 <a:latin typeface="Calibri Light"/>
               </a:rPr>
-              <a:t>Wrap-Up</a:t>
-            </a:r>
-          </a:p>
-        </p:txBody>
-      </p:sp>
-      <p:sp>
-        <p:nvSpPr>
-          <p:cNvPr id="3" name="Rectangle 2"/>
+              <a:t>Your Field Build</a:t>
+            </a:r>
+          </a:p>
+        </p:txBody>
+      </p:sp>
+      <p:sp>
+        <p:nvSpPr>
+          <p:cNvPr id="4" name="Rectangle 3"/>
           <p:cNvSpPr/>
           <p:nvPr/>
         </p:nvSpPr>
         <p:spPr>
           <a:xfrm>
-            <a:off x="777240" y="1417320"/>
+            <a:off x="777240" y="1783080"/>
             <a:ext cx="1051560" cy="38100"/>
           </a:xfrm>
           <a:prstGeom prst="rect">
             <a:avLst/>
           </a:prstGeom>
           <a:solidFill>
-            <a:srgbClr val="0F766E"/>
+            <a:srgbClr val="B45309"/>
           </a:solidFill>
           <a:ln>
             <a:noFill/>
@@ -6939,14 +8013,14 @@
       </p:sp>
       <p:sp>
         <p:nvSpPr>
-          <p:cNvPr id="4" name="TextBox 3"/>
+          <p:cNvPr id="5" name="TextBox 4"/>
           <p:cNvSpPr txBox="1"/>
           <p:nvPr/>
         </p:nvSpPr>
         <p:spPr>
           <a:xfrm>
-            <a:off x="777240" y="1783080"/>
-            <a:ext cx="10637215" cy="4343400"/>
+            <a:off x="777240" y="2148840"/>
+            <a:ext cx="10637215" cy="3931920"/>
           </a:xfrm>
           <a:prstGeom prst="rect">
             <a:avLst/>
@@ -6968,13 +8042,32 @@
               </a:spcAft>
             </a:pPr>
             <a:r>
-              <a:rPr sz="1900" b="0" i="0">
+              <a:rPr sz="1900" b="1" i="0">
                 <a:solidFill>
                   <a:srgbClr val="1F2937"/>
                 </a:solidFill>
                 <a:latin typeface="Calibri"/>
               </a:rPr>
-              <a:t>•  Design is the skill. Building is now the easy part.</a:t>
+              <a:t>•  1.  Fill the worksheet. All six questions. Ten minutes.</a:t>
+            </a:r>
+          </a:p>
+          <a:p>
+            <a:pPr lvl="1">
+              <a:lnSpc>
+                <a:spcPct val="115000"/>
+              </a:lnSpc>
+              <a:spcAft>
+                <a:spcPts val="500"/>
+              </a:spcAft>
+            </a:pPr>
+            <a:r>
+              <a:rPr sz="1600" b="0" i="0">
+                <a:solidFill>
+                  <a:srgbClr val="333D4B"/>
+                </a:solidFill>
+                <a:latin typeface="Calibri"/>
+              </a:rPr>
+              <a:t>—  Write it down. Everyone finishes this part — it needs no tool and no account.</a:t>
             </a:r>
           </a:p>
           <a:p>
@@ -6987,13 +8080,32 @@
               </a:spcAft>
             </a:pPr>
             <a:r>
-              <a:rPr sz="1900" b="0" i="0">
+              <a:rPr sz="1900" b="1" i="0">
                 <a:solidFill>
                   <a:srgbClr val="1F2937"/>
                 </a:solidFill>
                 <a:latin typeface="Calibri"/>
               </a:rPr>
-              <a:t>•  Six questions: task · sources · steps · human · how you'd know · who is harmed</a:t>
+              <a:t>•  2.  Check it against the good-candidate list.</a:t>
+            </a:r>
+          </a:p>
+          <a:p>
+            <a:pPr lvl="1">
+              <a:lnSpc>
+                <a:spcPct val="115000"/>
+              </a:lnSpc>
+              <a:spcAft>
+                <a:spcPts val="500"/>
+              </a:spcAft>
+            </a:pPr>
+            <a:r>
+              <a:rPr sz="1600" b="0" i="0">
+                <a:solidFill>
+                  <a:srgbClr val="333D4B"/>
+                </a:solidFill>
+                <a:latin typeface="Calibri"/>
+              </a:rPr>
+              <a:t>—  If it fails on scope, cut it in half and fill the worksheet again.</a:t>
             </a:r>
           </a:p>
           <a:p>
@@ -7012,7 +8124,26 @@
                 </a:solidFill>
                 <a:latin typeface="Calibri"/>
               </a:rPr>
-              <a:t>•  In a good design, most decisions are about what the system must not do</a:t>
+              <a:t>•  3.  Then build as far as you get in the remaining ten minutes.</a:t>
+            </a:r>
+          </a:p>
+          <a:p>
+            <a:pPr lvl="1">
+              <a:lnSpc>
+                <a:spcPct val="115000"/>
+              </a:lnSpc>
+              <a:spcAft>
+                <a:spcPts val="500"/>
+              </a:spcAft>
+            </a:pPr>
+            <a:r>
+              <a:rPr sz="1600" b="0" i="0">
+                <a:solidFill>
+                  <a:srgbClr val="333D4B"/>
+                </a:solidFill>
+                <a:latin typeface="Calibri"/>
+              </a:rPr>
+              <a:t>—  Ground it, or make the tool, or write the three steps out. Any progress is fine.</a:t>
             </a:r>
           </a:p>
           <a:p>
@@ -7024,15 +8155,6 @@
                 <a:spcPts val="1000"/>
               </a:spcAft>
             </a:pPr>
-            <a:r>
-              <a:rPr sz="1900" b="0" i="0">
-                <a:solidFill>
-                  <a:srgbClr val="1F2937"/>
-                </a:solidFill>
-                <a:latin typeface="Calibri"/>
-              </a:rPr>
-              <a:t>•  The human goes before the irreversible action</a:t>
-            </a:r>
           </a:p>
           <a:p>
             <a:pPr>
@@ -7044,68 +8166,20 @@
               </a:spcAft>
             </a:pPr>
             <a:r>
-              <a:rPr sz="1900" b="0" i="0">
+              <a:rPr sz="1900" b="1" i="0">
                 <a:solidFill>
                   <a:srgbClr val="1F2937"/>
                 </a:solidFill>
                 <a:latin typeface="Calibri"/>
               </a:rPr>
-              <a:t>•  Name the person who would be harmed — a category is not an answer</a:t>
-            </a:r>
-          </a:p>
-          <a:p>
-            <a:pPr>
-              <a:lnSpc>
-                <a:spcPct val="115000"/>
-              </a:lnSpc>
-              <a:spcAft>
-                <a:spcPts val="1000"/>
-              </a:spcAft>
-            </a:pPr>
-          </a:p>
-          <a:p>
-            <a:pPr>
-              <a:lnSpc>
-                <a:spcPct val="115000"/>
-              </a:lnSpc>
-              <a:spcAft>
-                <a:spcPts val="1000"/>
-              </a:spcAft>
-            </a:pPr>
-            <a:r>
-              <a:rPr sz="1900" b="1" i="0">
-                <a:solidFill>
-                  <a:srgbClr val="1F2937"/>
-                </a:solidFill>
-                <a:latin typeface="Calibri"/>
-              </a:rPr>
-              <a:t>•  Next week:</a:t>
-            </a:r>
-          </a:p>
-          <a:p>
-            <a:pPr lvl="1">
-              <a:lnSpc>
-                <a:spcPct val="115000"/>
-              </a:lnSpc>
-              <a:spcAft>
-                <a:spcPts val="500"/>
-              </a:spcAft>
-            </a:pPr>
-            <a:r>
-              <a:rPr sz="1600" b="0" i="0">
-                <a:solidFill>
-                  <a:srgbClr val="333D4B"/>
-                </a:solidFill>
-                <a:latin typeface="Calibri"/>
-              </a:rPr>
-              <a:t>—  Domain-Specific Applications — making the output look like work from your profession</a:t>
-            </a:r>
-          </a:p>
-        </p:txBody>
-      </p:sp>
-      <p:sp>
-        <p:nvSpPr>
-          <p:cNvPr id="5" name="TextBox 4"/>
+              <a:t>•  The worksheet is the deliverable. The working system is a bonus.</a:t>
+            </a:r>
+          </a:p>
+        </p:txBody>
+      </p:sp>
+      <p:sp>
+        <p:nvSpPr>
+          <p:cNvPr id="6" name="TextBox 5"/>
           <p:cNvSpPr txBox="1"/>
           <p:nvPr/>
         </p:nvSpPr>
@@ -7139,7 +8213,7 @@
       </p:sp>
       <p:sp>
         <p:nvSpPr>
-          <p:cNvPr id="6" name="TextBox 5"/>
+          <p:cNvPr id="7" name="TextBox 6"/>
           <p:cNvSpPr txBox="1"/>
           <p:nvPr/>
         </p:nvSpPr>
@@ -7192,6 +8266,1100 @@
       <p:grpSpPr/>
       <p:sp>
         <p:nvSpPr>
+          <p:cNvPr id="2" name="TextBox 1"/>
+          <p:cNvSpPr txBox="1"/>
+          <p:nvPr/>
+        </p:nvSpPr>
+        <p:spPr>
+          <a:xfrm>
+            <a:off x="777240" y="566928"/>
+            <a:ext cx="10637215" cy="822960"/>
+          </a:xfrm>
+          <a:prstGeom prst="rect">
+            <a:avLst/>
+          </a:prstGeom>
+          <a:noFill/>
+        </p:spPr>
+        <p:txBody>
+          <a:bodyPr wrap="square" lIns="0" rIns="0" tIns="0" bIns="0">
+            <a:spAutoFit/>
+          </a:bodyPr>
+          <a:lstStyle/>
+          <a:p>
+            <a:r>
+              <a:rPr sz="3000" b="1" i="0">
+                <a:solidFill>
+                  <a:srgbClr val="1F2937"/>
+                </a:solidFill>
+                <a:latin typeface="Calibri Light"/>
+              </a:rPr>
+              <a:t>The Two Questions People Get Wrong</a:t>
+            </a:r>
+          </a:p>
+        </p:txBody>
+      </p:sp>
+      <p:sp>
+        <p:nvSpPr>
+          <p:cNvPr id="3" name="Rectangle 2"/>
+          <p:cNvSpPr/>
+          <p:nvPr/>
+        </p:nvSpPr>
+        <p:spPr>
+          <a:xfrm>
+            <a:off x="777240" y="1417320"/>
+            <a:ext cx="1051560" cy="38100"/>
+          </a:xfrm>
+          <a:prstGeom prst="rect">
+            <a:avLst/>
+          </a:prstGeom>
+          <a:solidFill>
+            <a:srgbClr val="0F766E"/>
+          </a:solidFill>
+          <a:ln>
+            <a:noFill/>
+          </a:ln>
+          <a:effectLst/>
+        </p:spPr>
+        <p:style>
+          <a:lnRef idx="1">
+            <a:schemeClr val="accent1"/>
+          </a:lnRef>
+          <a:fillRef idx="3">
+            <a:schemeClr val="accent1"/>
+          </a:fillRef>
+          <a:effectRef idx="2">
+            <a:schemeClr val="accent1"/>
+          </a:effectRef>
+          <a:fontRef idx="minor">
+            <a:schemeClr val="lt1"/>
+          </a:fontRef>
+        </p:style>
+        <p:txBody>
+          <a:bodyPr rtlCol="0" anchor="ctr"/>
+          <a:lstStyle/>
+          <a:p>
+            <a:pPr algn="ctr"/>
+          </a:p>
+        </p:txBody>
+      </p:sp>
+      <p:sp>
+        <p:nvSpPr>
+          <p:cNvPr id="4" name="TextBox 3"/>
+          <p:cNvSpPr txBox="1"/>
+          <p:nvPr/>
+        </p:nvSpPr>
+        <p:spPr>
+          <a:xfrm>
+            <a:off x="777240" y="1783080"/>
+            <a:ext cx="10637215" cy="4343400"/>
+          </a:xfrm>
+          <a:prstGeom prst="rect">
+            <a:avLst/>
+          </a:prstGeom>
+          <a:noFill/>
+        </p:spPr>
+        <p:txBody>
+          <a:bodyPr wrap="square" lIns="0" rIns="0" tIns="0" bIns="0">
+            <a:spAutoFit/>
+          </a:bodyPr>
+          <a:lstStyle/>
+          <a:p>
+            <a:pPr>
+              <a:lnSpc>
+                <a:spcPct val="115000"/>
+              </a:lnSpc>
+              <a:spcAft>
+                <a:spcPts val="1000"/>
+              </a:spcAft>
+            </a:pPr>
+            <a:r>
+              <a:rPr sz="1900" b="1" i="0">
+                <a:solidFill>
+                  <a:srgbClr val="1F2937"/>
+                </a:solidFill>
+                <a:latin typeface="Calibri"/>
+              </a:rPr>
+              <a:t>•  Question 3 — the steps.</a:t>
+            </a:r>
+          </a:p>
+          <a:p>
+            <a:pPr lvl="1">
+              <a:lnSpc>
+                <a:spcPct val="115000"/>
+              </a:lnSpc>
+              <a:spcAft>
+                <a:spcPts val="500"/>
+              </a:spcAft>
+            </a:pPr>
+            <a:r>
+              <a:rPr sz="1600" b="0" i="0">
+                <a:solidFill>
+                  <a:srgbClr val="333D4B"/>
+                </a:solidFill>
+                <a:latin typeface="Calibri"/>
+              </a:rPr>
+              <a:t>—  Most first drafts have five or six steps. Almost all of them collapse to two or three.</a:t>
+            </a:r>
+          </a:p>
+          <a:p>
+            <a:pPr lvl="1">
+              <a:lnSpc>
+                <a:spcPct val="115000"/>
+              </a:lnSpc>
+              <a:spcAft>
+                <a:spcPts val="500"/>
+              </a:spcAft>
+            </a:pPr>
+            <a:r>
+              <a:rPr sz="1600" b="0" i="0">
+                <a:solidFill>
+                  <a:srgbClr val="333D4B"/>
+                </a:solidFill>
+                <a:latin typeface="Calibri"/>
+              </a:rPr>
+              <a:t>—  "Read the document" and "find the relevant part" are not two steps. They are one.</a:t>
+            </a:r>
+          </a:p>
+          <a:p>
+            <a:pPr>
+              <a:lnSpc>
+                <a:spcPct val="115000"/>
+              </a:lnSpc>
+              <a:spcAft>
+                <a:spcPts val="1000"/>
+              </a:spcAft>
+            </a:pPr>
+          </a:p>
+          <a:p>
+            <a:pPr>
+              <a:lnSpc>
+                <a:spcPct val="115000"/>
+              </a:lnSpc>
+              <a:spcAft>
+                <a:spcPts val="1000"/>
+              </a:spcAft>
+            </a:pPr>
+            <a:r>
+              <a:rPr sz="1900" b="1" i="0">
+                <a:solidFill>
+                  <a:srgbClr val="1F2937"/>
+                </a:solidFill>
+                <a:latin typeface="Calibri"/>
+              </a:rPr>
+              <a:t>•  Question 6 — who is harmed.</a:t>
+            </a:r>
+          </a:p>
+          <a:p>
+            <a:pPr lvl="1">
+              <a:lnSpc>
+                <a:spcPct val="115000"/>
+              </a:lnSpc>
+              <a:spcAft>
+                <a:spcPts val="500"/>
+              </a:spcAft>
+            </a:pPr>
+            <a:r>
+              <a:rPr sz="1600" b="0" i="0">
+                <a:solidFill>
+                  <a:srgbClr val="333D4B"/>
+                </a:solidFill>
+                <a:latin typeface="Calibri"/>
+              </a:rPr>
+              <a:t>—  "Users could get wrong information" is not an answer. It is a way of not answering.</a:t>
+            </a:r>
+          </a:p>
+          <a:p>
+            <a:pPr lvl="1">
+              <a:lnSpc>
+                <a:spcPct val="115000"/>
+              </a:lnSpc>
+              <a:spcAft>
+                <a:spcPts val="500"/>
+              </a:spcAft>
+            </a:pPr>
+            <a:r>
+              <a:rPr sz="1600" b="0" i="0">
+                <a:solidFill>
+                  <a:srgbClr val="333D4B"/>
+                </a:solidFill>
+                <a:latin typeface="Calibri"/>
+              </a:rPr>
+              <a:t>—  "A student misses a resit because they were told the wrong date" is an answer — and it changes the design.</a:t>
+            </a:r>
+          </a:p>
+          <a:p>
+            <a:pPr>
+              <a:lnSpc>
+                <a:spcPct val="115000"/>
+              </a:lnSpc>
+              <a:spcAft>
+                <a:spcPts val="1000"/>
+              </a:spcAft>
+            </a:pPr>
+          </a:p>
+          <a:p>
+            <a:pPr lvl="1">
+              <a:lnSpc>
+                <a:spcPct val="115000"/>
+              </a:lnSpc>
+              <a:spcAft>
+                <a:spcPts val="500"/>
+              </a:spcAft>
+            </a:pPr>
+            <a:r>
+              <a:rPr sz="1600" b="0" i="0">
+                <a:solidFill>
+                  <a:srgbClr val="333D4B"/>
+                </a:solidFill>
+                <a:latin typeface="Calibri"/>
+              </a:rPr>
+              <a:t>—  Naming a specific person is the single most useful thing on the worksheet.</a:t>
+            </a:r>
+          </a:p>
+        </p:txBody>
+      </p:sp>
+      <p:sp>
+        <p:nvSpPr>
+          <p:cNvPr id="5" name="TextBox 4"/>
+          <p:cNvSpPr txBox="1"/>
+          <p:nvPr/>
+        </p:nvSpPr>
+        <p:spPr>
+          <a:xfrm>
+            <a:off x="777240" y="6355080"/>
+            <a:ext cx="10637215" cy="274320"/>
+          </a:xfrm>
+          <a:prstGeom prst="rect">
+            <a:avLst/>
+          </a:prstGeom>
+          <a:noFill/>
+        </p:spPr>
+        <p:txBody>
+          <a:bodyPr wrap="square" lIns="0" rIns="0" tIns="0" bIns="0">
+            <a:spAutoFit/>
+          </a:bodyPr>
+          <a:lstStyle/>
+          <a:p>
+            <a:r>
+              <a:rPr sz="1000" b="0" i="0">
+                <a:solidFill>
+                  <a:srgbClr val="6B7787"/>
+                </a:solidFill>
+                <a:latin typeface="Calibri"/>
+              </a:rPr>
+              <a:t>Week 10  ·  Prompt Engineering and Large Language Models</a:t>
+            </a:r>
+          </a:p>
+        </p:txBody>
+      </p:sp>
+      <p:sp>
+        <p:nvSpPr>
+          <p:cNvPr id="6" name="TextBox 5"/>
+          <p:cNvSpPr txBox="1"/>
+          <p:nvPr/>
+        </p:nvSpPr>
+        <p:spPr>
+          <a:xfrm>
+            <a:off x="10500055" y="6355080"/>
+            <a:ext cx="914400" cy="274320"/>
+          </a:xfrm>
+          <a:prstGeom prst="rect">
+            <a:avLst/>
+          </a:prstGeom>
+          <a:noFill/>
+        </p:spPr>
+        <p:txBody>
+          <a:bodyPr wrap="square" lIns="0" rIns="0" tIns="0" bIns="0">
+            <a:spAutoFit/>
+          </a:bodyPr>
+          <a:lstStyle/>
+          <a:p>
+            <a:pPr algn="r"/>
+            <a:r>
+              <a:rPr sz="1000" b="0" i="0">
+                <a:solidFill>
+                  <a:srgbClr val="6B7787"/>
+                </a:solidFill>
+                <a:latin typeface="Calibri"/>
+              </a:rPr>
+              <a:t>15</a:t>
+            </a:r>
+          </a:p>
+        </p:txBody>
+      </p:sp>
+    </p:spTree>
+  </p:cSld>
+  <p:clrMapOvr>
+    <a:masterClrMapping/>
+  </p:clrMapOvr>
+</p:sld>
+</file>
+
+<file path=ppt/slides/slide16.xml><?xml version="1.0" encoding="utf-8"?>
+<p:sld xmlns:a="http://schemas.openxmlformats.org/drawingml/2006/main" xmlns:p="http://schemas.openxmlformats.org/presentationml/2006/main" xmlns:r="http://schemas.openxmlformats.org/officeDocument/2006/relationships">
+  <p:cSld>
+    <p:spTree>
+      <p:nvGrpSpPr>
+        <p:cNvPr id="1" name=""/>
+        <p:cNvGrpSpPr/>
+        <p:nvPr/>
+      </p:nvGrpSpPr>
+      <p:grpSpPr/>
+      <p:sp>
+        <p:nvSpPr>
+          <p:cNvPr id="2" name="TextBox 1"/>
+          <p:cNvSpPr txBox="1"/>
+          <p:nvPr/>
+        </p:nvSpPr>
+        <p:spPr>
+          <a:xfrm>
+            <a:off x="777240" y="566928"/>
+            <a:ext cx="10637215" cy="822960"/>
+          </a:xfrm>
+          <a:prstGeom prst="rect">
+            <a:avLst/>
+          </a:prstGeom>
+          <a:noFill/>
+        </p:spPr>
+        <p:txBody>
+          <a:bodyPr wrap="square" lIns="0" rIns="0" tIns="0" bIns="0">
+            <a:spAutoFit/>
+          </a:bodyPr>
+          <a:lstStyle/>
+          <a:p>
+            <a:r>
+              <a:rPr sz="3000" b="1" i="0">
+                <a:solidFill>
+                  <a:srgbClr val="1F2937"/>
+                </a:solidFill>
+                <a:latin typeface="Calibri Light"/>
+              </a:rPr>
+              <a:t>Concepts You Must Be Able to Define and Diagnose</a:t>
+            </a:r>
+          </a:p>
+        </p:txBody>
+      </p:sp>
+      <p:sp>
+        <p:nvSpPr>
+          <p:cNvPr id="3" name="Rectangle 2"/>
+          <p:cNvSpPr/>
+          <p:nvPr/>
+        </p:nvSpPr>
+        <p:spPr>
+          <a:xfrm>
+            <a:off x="777240" y="1417320"/>
+            <a:ext cx="1051560" cy="38100"/>
+          </a:xfrm>
+          <a:prstGeom prst="rect">
+            <a:avLst/>
+          </a:prstGeom>
+          <a:solidFill>
+            <a:srgbClr val="0F766E"/>
+          </a:solidFill>
+          <a:ln>
+            <a:noFill/>
+          </a:ln>
+          <a:effectLst/>
+        </p:spPr>
+        <p:style>
+          <a:lnRef idx="1">
+            <a:schemeClr val="accent1"/>
+          </a:lnRef>
+          <a:fillRef idx="3">
+            <a:schemeClr val="accent1"/>
+          </a:fillRef>
+          <a:effectRef idx="2">
+            <a:schemeClr val="accent1"/>
+          </a:effectRef>
+          <a:fontRef idx="minor">
+            <a:schemeClr val="lt1"/>
+          </a:fontRef>
+        </p:style>
+        <p:txBody>
+          <a:bodyPr rtlCol="0" anchor="ctr"/>
+          <a:lstStyle/>
+          <a:p>
+            <a:pPr algn="ctr"/>
+          </a:p>
+        </p:txBody>
+      </p:sp>
+      <p:sp>
+        <p:nvSpPr>
+          <p:cNvPr id="4" name="Rectangle 3"/>
+          <p:cNvSpPr/>
+          <p:nvPr/>
+        </p:nvSpPr>
+        <p:spPr>
+          <a:xfrm>
+            <a:off x="777240" y="1783080"/>
+            <a:ext cx="10637215" cy="4251960"/>
+          </a:xfrm>
+          <a:prstGeom prst="rect">
+            <a:avLst/>
+          </a:prstGeom>
+          <a:solidFill>
+            <a:srgbClr val="F1F5F9"/>
+          </a:solidFill>
+          <a:ln>
+            <a:noFill/>
+          </a:ln>
+          <a:effectLst/>
+        </p:spPr>
+        <p:style>
+          <a:lnRef idx="1">
+            <a:schemeClr val="accent1"/>
+          </a:lnRef>
+          <a:fillRef idx="3">
+            <a:schemeClr val="accent1"/>
+          </a:fillRef>
+          <a:effectRef idx="2">
+            <a:schemeClr val="accent1"/>
+          </a:effectRef>
+          <a:fontRef idx="minor">
+            <a:schemeClr val="lt1"/>
+          </a:fontRef>
+        </p:style>
+        <p:txBody>
+          <a:bodyPr rtlCol="0" anchor="ctr"/>
+          <a:lstStyle/>
+          <a:p>
+            <a:pPr algn="ctr"/>
+          </a:p>
+        </p:txBody>
+      </p:sp>
+      <p:sp>
+        <p:nvSpPr>
+          <p:cNvPr id="5" name="TextBox 4"/>
+          <p:cNvSpPr txBox="1"/>
+          <p:nvPr/>
+        </p:nvSpPr>
+        <p:spPr>
+          <a:xfrm>
+            <a:off x="1188720" y="2103120"/>
+            <a:ext cx="9814255" cy="3611880"/>
+          </a:xfrm>
+          <a:prstGeom prst="rect">
+            <a:avLst/>
+          </a:prstGeom>
+          <a:noFill/>
+        </p:spPr>
+        <p:txBody>
+          <a:bodyPr wrap="square" lIns="0" rIns="0" tIns="0" bIns="0">
+            <a:spAutoFit/>
+          </a:bodyPr>
+          <a:lstStyle/>
+          <a:p>
+            <a:pPr>
+              <a:lnSpc>
+                <a:spcPct val="115000"/>
+              </a:lnSpc>
+              <a:spcAft>
+                <a:spcPts val="1000"/>
+              </a:spcAft>
+            </a:pPr>
+            <a:r>
+              <a:rPr sz="1900" b="1" i="0">
+                <a:solidFill>
+                  <a:srgbClr val="1F2937"/>
+                </a:solidFill>
+                <a:latin typeface="Calibri"/>
+              </a:rPr>
+              <a:t>•  The six design questions</a:t>
+            </a:r>
+          </a:p>
+          <a:p>
+            <a:pPr lvl="1">
+              <a:lnSpc>
+                <a:spcPct val="115000"/>
+              </a:lnSpc>
+              <a:spcAft>
+                <a:spcPts val="500"/>
+              </a:spcAft>
+            </a:pPr>
+            <a:r>
+              <a:rPr sz="1600" b="0" i="0">
+                <a:solidFill>
+                  <a:srgbClr val="333D4B"/>
+                </a:solidFill>
+                <a:latin typeface="Calibri"/>
+              </a:rPr>
+              <a:t>—  Task · sources · steps · human placement · how you would know it works · what could go wrong and to whom.</a:t>
+            </a:r>
+          </a:p>
+          <a:p>
+            <a:pPr>
+              <a:lnSpc>
+                <a:spcPct val="115000"/>
+              </a:lnSpc>
+              <a:spcAft>
+                <a:spcPts val="1000"/>
+              </a:spcAft>
+            </a:pPr>
+            <a:r>
+              <a:rPr sz="1900" b="1" i="0">
+                <a:solidFill>
+                  <a:srgbClr val="1F2937"/>
+                </a:solidFill>
+                <a:latin typeface="Calibri"/>
+              </a:rPr>
+              <a:t>•  Good candidate criteria</a:t>
+            </a:r>
+          </a:p>
+          <a:p>
+            <a:pPr lvl="1">
+              <a:lnSpc>
+                <a:spcPct val="115000"/>
+              </a:lnSpc>
+              <a:spcAft>
+                <a:spcPts val="500"/>
+              </a:spcAft>
+            </a:pPr>
+            <a:r>
+              <a:rPr sz="1600" b="0" i="0">
+                <a:solidFill>
+                  <a:srgbClr val="333D4B"/>
+                </a:solidFill>
+                <a:latin typeface="Calibri"/>
+              </a:rPr>
+              <a:t>—  Repetitive · answers exist in documents · wrong answers recoverable · delay harmless · you can grade the output.</a:t>
+            </a:r>
+          </a:p>
+          <a:p>
+            <a:pPr>
+              <a:lnSpc>
+                <a:spcPct val="115000"/>
+              </a:lnSpc>
+              <a:spcAft>
+                <a:spcPts val="1000"/>
+              </a:spcAft>
+            </a:pPr>
+            <a:r>
+              <a:rPr sz="1900" b="1" i="0">
+                <a:solidFill>
+                  <a:srgbClr val="1F2937"/>
+                </a:solidFill>
+                <a:latin typeface="Calibri"/>
+              </a:rPr>
+              <a:t>•  Constraint over capability</a:t>
+            </a:r>
+          </a:p>
+          <a:p>
+            <a:pPr lvl="1">
+              <a:lnSpc>
+                <a:spcPct val="115000"/>
+              </a:lnSpc>
+              <a:spcAft>
+                <a:spcPts val="500"/>
+              </a:spcAft>
+            </a:pPr>
+            <a:r>
+              <a:rPr sz="1600" b="0" i="0">
+                <a:solidFill>
+                  <a:srgbClr val="333D4B"/>
+                </a:solidFill>
+                <a:latin typeface="Calibri"/>
+              </a:rPr>
+              <a:t>—  In a good design most decisions are about what the system must not do. Capability is free; constraints are the engineering.</a:t>
+            </a:r>
+          </a:p>
+          <a:p>
+            <a:pPr>
+              <a:lnSpc>
+                <a:spcPct val="115000"/>
+              </a:lnSpc>
+              <a:spcAft>
+                <a:spcPts val="1000"/>
+              </a:spcAft>
+            </a:pPr>
+            <a:r>
+              <a:rPr sz="1900" b="1" i="0">
+                <a:solidFill>
+                  <a:srgbClr val="1F2937"/>
+                </a:solidFill>
+                <a:latin typeface="Calibri"/>
+              </a:rPr>
+              <a:t>•  Human placement</a:t>
+            </a:r>
+          </a:p>
+          <a:p>
+            <a:pPr lvl="1">
+              <a:lnSpc>
+                <a:spcPct val="115000"/>
+              </a:lnSpc>
+              <a:spcAft>
+                <a:spcPts val="500"/>
+              </a:spcAft>
+            </a:pPr>
+            <a:r>
+              <a:rPr sz="1600" b="0" i="0">
+                <a:solidFill>
+                  <a:srgbClr val="333D4B"/>
+                </a:solidFill>
+                <a:latin typeface="Calibri"/>
+              </a:rPr>
+              <a:t>—  The human goes before the irreversible action, not at the end of the process. Identify the irreversible step first.</a:t>
+            </a:r>
+          </a:p>
+          <a:p>
+            <a:pPr>
+              <a:lnSpc>
+                <a:spcPct val="115000"/>
+              </a:lnSpc>
+              <a:spcAft>
+                <a:spcPts val="1000"/>
+              </a:spcAft>
+            </a:pPr>
+            <a:r>
+              <a:rPr sz="1900" b="1" i="0">
+                <a:solidFill>
+                  <a:srgbClr val="1F2937"/>
+                </a:solidFill>
+                <a:latin typeface="Calibri"/>
+              </a:rPr>
+              <a:t>•  Naming the harmed person</a:t>
+            </a:r>
+          </a:p>
+          <a:p>
+            <a:pPr lvl="1">
+              <a:lnSpc>
+                <a:spcPct val="115000"/>
+              </a:lnSpc>
+              <a:spcAft>
+                <a:spcPts val="500"/>
+              </a:spcAft>
+            </a:pPr>
+            <a:r>
+              <a:rPr sz="1600" b="0" i="0">
+                <a:solidFill>
+                  <a:srgbClr val="333D4B"/>
+                </a:solidFill>
+                <a:latin typeface="Calibri"/>
+              </a:rPr>
+              <a:t>—  A specific person, not a category. Specificity changes the design; abstraction does not.</a:t>
+            </a:r>
+          </a:p>
+        </p:txBody>
+      </p:sp>
+      <p:sp>
+        <p:nvSpPr>
+          <p:cNvPr id="6" name="TextBox 5"/>
+          <p:cNvSpPr txBox="1"/>
+          <p:nvPr/>
+        </p:nvSpPr>
+        <p:spPr>
+          <a:xfrm>
+            <a:off x="777240" y="6355080"/>
+            <a:ext cx="10637215" cy="274320"/>
+          </a:xfrm>
+          <a:prstGeom prst="rect">
+            <a:avLst/>
+          </a:prstGeom>
+          <a:noFill/>
+        </p:spPr>
+        <p:txBody>
+          <a:bodyPr wrap="square" lIns="0" rIns="0" tIns="0" bIns="0">
+            <a:spAutoFit/>
+          </a:bodyPr>
+          <a:lstStyle/>
+          <a:p>
+            <a:r>
+              <a:rPr sz="1000" b="0" i="0">
+                <a:solidFill>
+                  <a:srgbClr val="6B7787"/>
+                </a:solidFill>
+                <a:latin typeface="Calibri"/>
+              </a:rPr>
+              <a:t>Week 10  ·  Prompt Engineering and Large Language Models</a:t>
+            </a:r>
+          </a:p>
+        </p:txBody>
+      </p:sp>
+      <p:sp>
+        <p:nvSpPr>
+          <p:cNvPr id="7" name="TextBox 6"/>
+          <p:cNvSpPr txBox="1"/>
+          <p:nvPr/>
+        </p:nvSpPr>
+        <p:spPr>
+          <a:xfrm>
+            <a:off x="10500055" y="6355080"/>
+            <a:ext cx="914400" cy="274320"/>
+          </a:xfrm>
+          <a:prstGeom prst="rect">
+            <a:avLst/>
+          </a:prstGeom>
+          <a:noFill/>
+        </p:spPr>
+        <p:txBody>
+          <a:bodyPr wrap="square" lIns="0" rIns="0" tIns="0" bIns="0">
+            <a:spAutoFit/>
+          </a:bodyPr>
+          <a:lstStyle/>
+          <a:p>
+            <a:pPr algn="r"/>
+            <a:r>
+              <a:rPr sz="1000" b="0" i="0">
+                <a:solidFill>
+                  <a:srgbClr val="6B7787"/>
+                </a:solidFill>
+                <a:latin typeface="Calibri"/>
+              </a:rPr>
+              <a:t>16</a:t>
+            </a:r>
+          </a:p>
+        </p:txBody>
+      </p:sp>
+    </p:spTree>
+  </p:cSld>
+  <p:clrMapOvr>
+    <a:masterClrMapping/>
+  </p:clrMapOvr>
+</p:sld>
+</file>
+
+<file path=ppt/slides/slide17.xml><?xml version="1.0" encoding="utf-8"?>
+<p:sld xmlns:a="http://schemas.openxmlformats.org/drawingml/2006/main" xmlns:p="http://schemas.openxmlformats.org/presentationml/2006/main" xmlns:r="http://schemas.openxmlformats.org/officeDocument/2006/relationships">
+  <p:cSld>
+    <p:spTree>
+      <p:nvGrpSpPr>
+        <p:cNvPr id="1" name=""/>
+        <p:cNvGrpSpPr/>
+        <p:nvPr/>
+      </p:nvGrpSpPr>
+      <p:grpSpPr/>
+      <p:sp>
+        <p:nvSpPr>
+          <p:cNvPr id="2" name="TextBox 1"/>
+          <p:cNvSpPr txBox="1"/>
+          <p:nvPr/>
+        </p:nvSpPr>
+        <p:spPr>
+          <a:xfrm>
+            <a:off x="777240" y="566928"/>
+            <a:ext cx="10637215" cy="822960"/>
+          </a:xfrm>
+          <a:prstGeom prst="rect">
+            <a:avLst/>
+          </a:prstGeom>
+          <a:noFill/>
+        </p:spPr>
+        <p:txBody>
+          <a:bodyPr wrap="square" lIns="0" rIns="0" tIns="0" bIns="0">
+            <a:spAutoFit/>
+          </a:bodyPr>
+          <a:lstStyle/>
+          <a:p>
+            <a:r>
+              <a:rPr sz="3000" b="1" i="0">
+                <a:solidFill>
+                  <a:srgbClr val="1F2937"/>
+                </a:solidFill>
+                <a:latin typeface="Calibri Light"/>
+              </a:rPr>
+              <a:t>Wrap-Up</a:t>
+            </a:r>
+          </a:p>
+        </p:txBody>
+      </p:sp>
+      <p:sp>
+        <p:nvSpPr>
+          <p:cNvPr id="3" name="Rectangle 2"/>
+          <p:cNvSpPr/>
+          <p:nvPr/>
+        </p:nvSpPr>
+        <p:spPr>
+          <a:xfrm>
+            <a:off x="777240" y="1417320"/>
+            <a:ext cx="1051560" cy="38100"/>
+          </a:xfrm>
+          <a:prstGeom prst="rect">
+            <a:avLst/>
+          </a:prstGeom>
+          <a:solidFill>
+            <a:srgbClr val="0F766E"/>
+          </a:solidFill>
+          <a:ln>
+            <a:noFill/>
+          </a:ln>
+          <a:effectLst/>
+        </p:spPr>
+        <p:style>
+          <a:lnRef idx="1">
+            <a:schemeClr val="accent1"/>
+          </a:lnRef>
+          <a:fillRef idx="3">
+            <a:schemeClr val="accent1"/>
+          </a:fillRef>
+          <a:effectRef idx="2">
+            <a:schemeClr val="accent1"/>
+          </a:effectRef>
+          <a:fontRef idx="minor">
+            <a:schemeClr val="lt1"/>
+          </a:fontRef>
+        </p:style>
+        <p:txBody>
+          <a:bodyPr rtlCol="0" anchor="ctr"/>
+          <a:lstStyle/>
+          <a:p>
+            <a:pPr algn="ctr"/>
+          </a:p>
+        </p:txBody>
+      </p:sp>
+      <p:sp>
+        <p:nvSpPr>
+          <p:cNvPr id="4" name="TextBox 3"/>
+          <p:cNvSpPr txBox="1"/>
+          <p:nvPr/>
+        </p:nvSpPr>
+        <p:spPr>
+          <a:xfrm>
+            <a:off x="777240" y="1783080"/>
+            <a:ext cx="10637215" cy="4343400"/>
+          </a:xfrm>
+          <a:prstGeom prst="rect">
+            <a:avLst/>
+          </a:prstGeom>
+          <a:noFill/>
+        </p:spPr>
+        <p:txBody>
+          <a:bodyPr wrap="square" lIns="0" rIns="0" tIns="0" bIns="0">
+            <a:spAutoFit/>
+          </a:bodyPr>
+          <a:lstStyle/>
+          <a:p>
+            <a:pPr>
+              <a:lnSpc>
+                <a:spcPct val="115000"/>
+              </a:lnSpc>
+              <a:spcAft>
+                <a:spcPts val="1000"/>
+              </a:spcAft>
+            </a:pPr>
+            <a:r>
+              <a:rPr sz="1900" b="0" i="0">
+                <a:solidFill>
+                  <a:srgbClr val="1F2937"/>
+                </a:solidFill>
+                <a:latin typeface="Calibri"/>
+              </a:rPr>
+              <a:t>•  Design is the skill. Building is now the easy part.</a:t>
+            </a:r>
+          </a:p>
+          <a:p>
+            <a:pPr>
+              <a:lnSpc>
+                <a:spcPct val="115000"/>
+              </a:lnSpc>
+              <a:spcAft>
+                <a:spcPts val="1000"/>
+              </a:spcAft>
+            </a:pPr>
+            <a:r>
+              <a:rPr sz="1900" b="0" i="0">
+                <a:solidFill>
+                  <a:srgbClr val="1F2937"/>
+                </a:solidFill>
+                <a:latin typeface="Calibri"/>
+              </a:rPr>
+              <a:t>•  Six questions: task · sources · steps · human · how you'd know · who is harmed</a:t>
+            </a:r>
+          </a:p>
+          <a:p>
+            <a:pPr>
+              <a:lnSpc>
+                <a:spcPct val="115000"/>
+              </a:lnSpc>
+              <a:spcAft>
+                <a:spcPts val="1000"/>
+              </a:spcAft>
+            </a:pPr>
+            <a:r>
+              <a:rPr sz="1900" b="1" i="0">
+                <a:solidFill>
+                  <a:srgbClr val="1F2937"/>
+                </a:solidFill>
+                <a:latin typeface="Calibri"/>
+              </a:rPr>
+              <a:t>•  In a good design, most decisions are about what the system must not do</a:t>
+            </a:r>
+          </a:p>
+          <a:p>
+            <a:pPr>
+              <a:lnSpc>
+                <a:spcPct val="115000"/>
+              </a:lnSpc>
+              <a:spcAft>
+                <a:spcPts val="1000"/>
+              </a:spcAft>
+            </a:pPr>
+            <a:r>
+              <a:rPr sz="1900" b="0" i="0">
+                <a:solidFill>
+                  <a:srgbClr val="1F2937"/>
+                </a:solidFill>
+                <a:latin typeface="Calibri"/>
+              </a:rPr>
+              <a:t>•  The human goes before the irreversible action</a:t>
+            </a:r>
+          </a:p>
+          <a:p>
+            <a:pPr>
+              <a:lnSpc>
+                <a:spcPct val="115000"/>
+              </a:lnSpc>
+              <a:spcAft>
+                <a:spcPts val="1000"/>
+              </a:spcAft>
+            </a:pPr>
+            <a:r>
+              <a:rPr sz="1900" b="0" i="0">
+                <a:solidFill>
+                  <a:srgbClr val="1F2937"/>
+                </a:solidFill>
+                <a:latin typeface="Calibri"/>
+              </a:rPr>
+              <a:t>•  Name the person who would be harmed — a category is not an answer</a:t>
+            </a:r>
+          </a:p>
+          <a:p>
+            <a:pPr>
+              <a:lnSpc>
+                <a:spcPct val="115000"/>
+              </a:lnSpc>
+              <a:spcAft>
+                <a:spcPts val="1000"/>
+              </a:spcAft>
+            </a:pPr>
+          </a:p>
+          <a:p>
+            <a:pPr>
+              <a:lnSpc>
+                <a:spcPct val="115000"/>
+              </a:lnSpc>
+              <a:spcAft>
+                <a:spcPts val="1000"/>
+              </a:spcAft>
+            </a:pPr>
+            <a:r>
+              <a:rPr sz="1900" b="1" i="0">
+                <a:solidFill>
+                  <a:srgbClr val="1F2937"/>
+                </a:solidFill>
+                <a:latin typeface="Calibri"/>
+              </a:rPr>
+              <a:t>•  Next week:</a:t>
+            </a:r>
+          </a:p>
+          <a:p>
+            <a:pPr lvl="1">
+              <a:lnSpc>
+                <a:spcPct val="115000"/>
+              </a:lnSpc>
+              <a:spcAft>
+                <a:spcPts val="500"/>
+              </a:spcAft>
+            </a:pPr>
+            <a:r>
+              <a:rPr sz="1600" b="0" i="0">
+                <a:solidFill>
+                  <a:srgbClr val="333D4B"/>
+                </a:solidFill>
+                <a:latin typeface="Calibri"/>
+              </a:rPr>
+              <a:t>—  Domain-Specific Applications — making the output look like work from your profession</a:t>
+            </a:r>
+          </a:p>
+        </p:txBody>
+      </p:sp>
+      <p:sp>
+        <p:nvSpPr>
+          <p:cNvPr id="5" name="TextBox 4"/>
+          <p:cNvSpPr txBox="1"/>
+          <p:nvPr/>
+        </p:nvSpPr>
+        <p:spPr>
+          <a:xfrm>
+            <a:off x="777240" y="6355080"/>
+            <a:ext cx="10637215" cy="274320"/>
+          </a:xfrm>
+          <a:prstGeom prst="rect">
+            <a:avLst/>
+          </a:prstGeom>
+          <a:noFill/>
+        </p:spPr>
+        <p:txBody>
+          <a:bodyPr wrap="square" lIns="0" rIns="0" tIns="0" bIns="0">
+            <a:spAutoFit/>
+          </a:bodyPr>
+          <a:lstStyle/>
+          <a:p>
+            <a:r>
+              <a:rPr sz="1000" b="0" i="0">
+                <a:solidFill>
+                  <a:srgbClr val="6B7787"/>
+                </a:solidFill>
+                <a:latin typeface="Calibri"/>
+              </a:rPr>
+              <a:t>Week 10  ·  Prompt Engineering and Large Language Models</a:t>
+            </a:r>
+          </a:p>
+        </p:txBody>
+      </p:sp>
+      <p:sp>
+        <p:nvSpPr>
+          <p:cNvPr id="6" name="TextBox 5"/>
+          <p:cNvSpPr txBox="1"/>
+          <p:nvPr/>
+        </p:nvSpPr>
+        <p:spPr>
+          <a:xfrm>
+            <a:off x="10500055" y="6355080"/>
+            <a:ext cx="914400" cy="274320"/>
+          </a:xfrm>
+          <a:prstGeom prst="rect">
+            <a:avLst/>
+          </a:prstGeom>
+          <a:noFill/>
+        </p:spPr>
+        <p:txBody>
+          <a:bodyPr wrap="square" lIns="0" rIns="0" tIns="0" bIns="0">
+            <a:spAutoFit/>
+          </a:bodyPr>
+          <a:lstStyle/>
+          <a:p>
+            <a:pPr algn="r"/>
+            <a:r>
+              <a:rPr sz="1000" b="0" i="0">
+                <a:solidFill>
+                  <a:srgbClr val="6B7787"/>
+                </a:solidFill>
+                <a:latin typeface="Calibri"/>
+              </a:rPr>
+              <a:t>17</a:t>
+            </a:r>
+          </a:p>
+        </p:txBody>
+      </p:sp>
+    </p:spTree>
+  </p:cSld>
+  <p:clrMapOvr>
+    <a:masterClrMapping/>
+  </p:clrMapOvr>
+</p:sld>
+</file>
+
+<file path=ppt/slides/slide18.xml><?xml version="1.0" encoding="utf-8"?>
+<p:sld xmlns:a="http://schemas.openxmlformats.org/drawingml/2006/main" xmlns:p="http://schemas.openxmlformats.org/presentationml/2006/main" xmlns:r="http://schemas.openxmlformats.org/officeDocument/2006/relationships">
+  <p:cSld>
+    <p:spTree>
+      <p:nvGrpSpPr>
+        <p:cNvPr id="1" name=""/>
+        <p:cNvGrpSpPr/>
+        <p:nvPr/>
+      </p:nvGrpSpPr>
+      <p:grpSpPr/>
+      <p:sp>
+        <p:nvSpPr>
           <p:cNvPr id="2" name="Rectangle 1"/>
           <p:cNvSpPr/>
           <p:nvPr/>
@@ -9867,7 +12035,7 @@
                 </a:solidFill>
                 <a:latin typeface="Calibri Light"/>
               </a:rPr>
-              <a:t>Good Candidates and Bad Ones</a:t>
+              <a:t>The Same Six Questions, Clinical</a:t>
             </a:r>
           </a:p>
         </p:txBody>
@@ -9918,106 +12086,14 @@
       </p:sp>
       <p:sp>
         <p:nvSpPr>
-          <p:cNvPr id="4" name="Rounded Rectangle 3"/>
-          <p:cNvSpPr/>
-          <p:nvPr/>
-        </p:nvSpPr>
-        <p:spPr>
-          <a:xfrm>
-            <a:off x="777240" y="2057400"/>
-            <a:ext cx="3301898" cy="3200400"/>
-          </a:xfrm>
-          <a:prstGeom prst="roundRect">
-            <a:avLst>
-              <a:gd name="adj" fmla="val 10000"/>
-            </a:avLst>
-          </a:prstGeom>
-          <a:solidFill>
-            <a:srgbClr val="F1F5F9"/>
-          </a:solidFill>
-          <a:ln w="15875">
-            <a:solidFill>
-              <a:srgbClr val="D3DDE6"/>
-            </a:solidFill>
-          </a:ln>
-          <a:effectLst/>
-        </p:spPr>
-        <p:style>
-          <a:lnRef idx="1">
-            <a:schemeClr val="accent1"/>
-          </a:lnRef>
-          <a:fillRef idx="3">
-            <a:schemeClr val="accent1"/>
-          </a:fillRef>
-          <a:effectRef idx="2">
-            <a:schemeClr val="accent1"/>
-          </a:effectRef>
-          <a:fontRef idx="minor">
-            <a:schemeClr val="lt1"/>
-          </a:fontRef>
-        </p:style>
-        <p:txBody>
-          <a:bodyPr rtlCol="0" anchor="ctr"/>
-          <a:lstStyle/>
-          <a:p>
-            <a:pPr algn="ctr"/>
-          </a:p>
-        </p:txBody>
-      </p:sp>
-      <p:sp>
-        <p:nvSpPr>
-          <p:cNvPr id="5" name="Rectangle 4"/>
-          <p:cNvSpPr/>
-          <p:nvPr/>
-        </p:nvSpPr>
-        <p:spPr>
-          <a:xfrm>
-            <a:off x="978408" y="2331720"/>
-            <a:ext cx="640080" cy="38100"/>
-          </a:xfrm>
-          <a:prstGeom prst="rect">
-            <a:avLst/>
-          </a:prstGeom>
-          <a:solidFill>
-            <a:srgbClr val="0F766E"/>
-          </a:solidFill>
-          <a:ln>
-            <a:noFill/>
-          </a:ln>
-          <a:effectLst/>
-        </p:spPr>
-        <p:style>
-          <a:lnRef idx="1">
-            <a:schemeClr val="accent1"/>
-          </a:lnRef>
-          <a:fillRef idx="3">
-            <a:schemeClr val="accent1"/>
-          </a:fillRef>
-          <a:effectRef idx="2">
-            <a:schemeClr val="accent1"/>
-          </a:effectRef>
-          <a:fontRef idx="minor">
-            <a:schemeClr val="lt1"/>
-          </a:fontRef>
-        </p:style>
-        <p:txBody>
-          <a:bodyPr rtlCol="0" anchor="ctr"/>
-          <a:lstStyle/>
-          <a:p>
-            <a:pPr algn="ctr"/>
-          </a:p>
-        </p:txBody>
-      </p:sp>
-      <p:sp>
-        <p:nvSpPr>
-          <p:cNvPr id="6" name="TextBox 5"/>
+          <p:cNvPr id="4" name="TextBox 3"/>
           <p:cNvSpPr txBox="1"/>
           <p:nvPr/>
         </p:nvSpPr>
         <p:spPr>
           <a:xfrm>
-            <a:off x="978408" y="2560320"/>
-            <a:ext cx="2899562" cy="640080"/>
+            <a:off x="777240" y="1783080"/>
+            <a:ext cx="10637215" cy="4343400"/>
           </a:xfrm>
           <a:prstGeom prst="rect">
             <a:avLst/>
@@ -10025,41 +12101,250 @@
           <a:noFill/>
         </p:spPr>
         <p:txBody>
-          <a:bodyPr wrap="square" lIns="0" rIns="0" tIns="0" bIns="0" anchor="t">
+          <a:bodyPr wrap="square" lIns="0" rIns="0" tIns="0" bIns="0">
             <a:spAutoFit/>
           </a:bodyPr>
           <a:lstStyle/>
           <a:p>
-            <a:pPr algn="l">
+            <a:pPr>
               <a:lnSpc>
-                <a:spcPct val="105000"/>
+                <a:spcPct val="115000"/>
               </a:lnSpc>
               <a:spcAft>
-                <a:spcPts val="200"/>
+                <a:spcPts val="1000"/>
               </a:spcAft>
             </a:pPr>
             <a:r>
-              <a:rPr sz="1800" b="1" i="0">
+              <a:rPr sz="1900" b="1" i="0">
                 <a:solidFill>
                   <a:srgbClr val="1F2937"/>
                 </a:solidFill>
                 <a:latin typeface="Calibri"/>
               </a:rPr>
-              <a:t>Good</a:t>
-            </a:r>
-          </a:p>
-        </p:txBody>
-      </p:sp>
-      <p:sp>
-        <p:nvSpPr>
-          <p:cNvPr id="7" name="TextBox 6"/>
+              <a:t>•  1.  Task</a:t>
+            </a:r>
+          </a:p>
+          <a:p>
+            <a:pPr lvl="1">
+              <a:lnSpc>
+                <a:spcPct val="115000"/>
+              </a:lnSpc>
+              <a:spcAft>
+                <a:spcPts val="500"/>
+              </a:spcAft>
+            </a:pPr>
+            <a:r>
+              <a:rPr sz="1600" b="0" i="0">
+                <a:solidFill>
+                  <a:srgbClr val="333D4B"/>
+                </a:solidFill>
+                <a:latin typeface="Calibri"/>
+              </a:rPr>
+              <a:t>—  Turn a consultation transcript into a structured note in our standard format.</a:t>
+            </a:r>
+          </a:p>
+          <a:p>
+            <a:pPr>
+              <a:lnSpc>
+                <a:spcPct val="115000"/>
+              </a:lnSpc>
+              <a:spcAft>
+                <a:spcPts val="1000"/>
+              </a:spcAft>
+            </a:pPr>
+            <a:r>
+              <a:rPr sz="1900" b="1" i="0">
+                <a:solidFill>
+                  <a:srgbClr val="1F2937"/>
+                </a:solidFill>
+                <a:latin typeface="Calibri"/>
+              </a:rPr>
+              <a:t>•  2.  Sources</a:t>
+            </a:r>
+          </a:p>
+          <a:p>
+            <a:pPr lvl="1">
+              <a:lnSpc>
+                <a:spcPct val="115000"/>
+              </a:lnSpc>
+              <a:spcAft>
+                <a:spcPts val="500"/>
+              </a:spcAft>
+            </a:pPr>
+            <a:r>
+              <a:rPr sz="1600" b="0" i="0">
+                <a:solidFill>
+                  <a:srgbClr val="333D4B"/>
+                </a:solidFill>
+                <a:latin typeface="Calibri"/>
+              </a:rPr>
+              <a:t>—  The department's note template and its completed examples. Not the patient record.</a:t>
+            </a:r>
+          </a:p>
+          <a:p>
+            <a:pPr>
+              <a:lnSpc>
+                <a:spcPct val="115000"/>
+              </a:lnSpc>
+              <a:spcAft>
+                <a:spcPts val="1000"/>
+              </a:spcAft>
+            </a:pPr>
+            <a:r>
+              <a:rPr sz="1900" b="1" i="0">
+                <a:solidFill>
+                  <a:srgbClr val="1F2937"/>
+                </a:solidFill>
+                <a:latin typeface="Calibri"/>
+              </a:rPr>
+              <a:t>•  3.  Steps</a:t>
+            </a:r>
+          </a:p>
+          <a:p>
+            <a:pPr lvl="1">
+              <a:lnSpc>
+                <a:spcPct val="115000"/>
+              </a:lnSpc>
+              <a:spcAft>
+                <a:spcPts val="500"/>
+              </a:spcAft>
+            </a:pPr>
+            <a:r>
+              <a:rPr sz="1600" b="0" i="0">
+                <a:solidFill>
+                  <a:srgbClr val="333D4B"/>
+                </a:solidFill>
+                <a:latin typeface="Calibri"/>
+              </a:rPr>
+              <a:t>—  One. Transcript in, structured draft out. There is no second step worth adding.</a:t>
+            </a:r>
+          </a:p>
+          <a:p>
+            <a:pPr>
+              <a:lnSpc>
+                <a:spcPct val="115000"/>
+              </a:lnSpc>
+              <a:spcAft>
+                <a:spcPts val="1000"/>
+              </a:spcAft>
+            </a:pPr>
+            <a:r>
+              <a:rPr sz="1900" b="1" i="0">
+                <a:solidFill>
+                  <a:srgbClr val="1F2937"/>
+                </a:solidFill>
+                <a:latin typeface="Calibri"/>
+              </a:rPr>
+              <a:t>•  4.  Human</a:t>
+            </a:r>
+          </a:p>
+          <a:p>
+            <a:pPr lvl="1">
+              <a:lnSpc>
+                <a:spcPct val="115000"/>
+              </a:lnSpc>
+              <a:spcAft>
+                <a:spcPts val="500"/>
+              </a:spcAft>
+            </a:pPr>
+            <a:r>
+              <a:rPr sz="1600" b="0" i="0">
+                <a:solidFill>
+                  <a:srgbClr val="333D4B"/>
+                </a:solidFill>
+                <a:latin typeface="Calibri"/>
+              </a:rPr>
+              <a:t>—  Before the note enters the record. The clinician edits and signs; the system never writes to anything.</a:t>
+            </a:r>
+          </a:p>
+          <a:p>
+            <a:pPr>
+              <a:lnSpc>
+                <a:spcPct val="115000"/>
+              </a:lnSpc>
+              <a:spcAft>
+                <a:spcPts val="1000"/>
+              </a:spcAft>
+            </a:pPr>
+            <a:r>
+              <a:rPr sz="1900" b="1" i="0">
+                <a:solidFill>
+                  <a:srgbClr val="1F2937"/>
+                </a:solidFill>
+                <a:latin typeface="Calibri"/>
+              </a:rPr>
+              <a:t>•  5.  How I would know</a:t>
+            </a:r>
+          </a:p>
+          <a:p>
+            <a:pPr lvl="1">
+              <a:lnSpc>
+                <a:spcPct val="115000"/>
+              </a:lnSpc>
+              <a:spcAft>
+                <a:spcPts val="500"/>
+              </a:spcAft>
+            </a:pPr>
+            <a:r>
+              <a:rPr sz="1600" b="0" i="0">
+                <a:solidFill>
+                  <a:srgbClr val="333D4B"/>
+                </a:solidFill>
+                <a:latin typeface="Calibri"/>
+              </a:rPr>
+              <a:t>—  Three transcripts where I already wrote the note by hand. Compare. Plus one where a key symptom is mentioned only in passing.</a:t>
+            </a:r>
+          </a:p>
+          <a:p>
+            <a:pPr>
+              <a:lnSpc>
+                <a:spcPct val="115000"/>
+              </a:lnSpc>
+              <a:spcAft>
+                <a:spcPts val="1000"/>
+              </a:spcAft>
+            </a:pPr>
+            <a:r>
+              <a:rPr sz="1900" b="1" i="0">
+                <a:solidFill>
+                  <a:srgbClr val="1F2937"/>
+                </a:solidFill>
+                <a:latin typeface="Calibri"/>
+              </a:rPr>
+              <a:t>•  6.  Who is harmed</a:t>
+            </a:r>
+          </a:p>
+          <a:p>
+            <a:pPr lvl="1">
+              <a:lnSpc>
+                <a:spcPct val="115000"/>
+              </a:lnSpc>
+              <a:spcAft>
+                <a:spcPts val="500"/>
+              </a:spcAft>
+            </a:pPr>
+            <a:r>
+              <a:rPr sz="1600" b="0" i="0">
+                <a:solidFill>
+                  <a:srgbClr val="333D4B"/>
+                </a:solidFill>
+                <a:latin typeface="Calibri"/>
+              </a:rPr>
+              <a:t>—  A patient whose reported symptom is dropped from the note because it was mentioned once, quietly, in the middle.</a:t>
+            </a:r>
+          </a:p>
+        </p:txBody>
+      </p:sp>
+      <p:sp>
+        <p:nvSpPr>
+          <p:cNvPr id="5" name="TextBox 4"/>
           <p:cNvSpPr txBox="1"/>
           <p:nvPr/>
         </p:nvSpPr>
         <p:spPr>
           <a:xfrm>
-            <a:off x="978408" y="3246120"/>
-            <a:ext cx="2899562" cy="1737360"/>
+            <a:off x="777240" y="6355080"/>
+            <a:ext cx="10637215" cy="274320"/>
           </a:xfrm>
           <a:prstGeom prst="rect">
             <a:avLst/>
@@ -10067,400 +12352,6 @@
           <a:noFill/>
         </p:spPr>
         <p:txBody>
-          <a:bodyPr wrap="square" lIns="0" rIns="0" tIns="0" bIns="0" anchor="t">
-            <a:spAutoFit/>
-          </a:bodyPr>
-          <a:lstStyle/>
-          <a:p>
-            <a:pPr algn="l">
-              <a:lnSpc>
-                <a:spcPct val="105000"/>
-              </a:lnSpc>
-              <a:spcAft>
-                <a:spcPts val="200"/>
-              </a:spcAft>
-            </a:pPr>
-            <a:r>
-              <a:rPr sz="1350" b="0" i="0">
-                <a:solidFill>
-                  <a:srgbClr val="333D4B"/>
-                </a:solidFill>
-                <a:latin typeface="Calibri"/>
-              </a:rPr>
-              <a:t>Repetitive. The answer exists in a document you can point at. A wrong answer is recoverable. Delay harms nobody. You personally understand the task well enough to grade the output.</a:t>
-            </a:r>
-          </a:p>
-        </p:txBody>
-      </p:sp>
-      <p:sp>
-        <p:nvSpPr>
-          <p:cNvPr id="8" name="Rounded Rectangle 7"/>
-          <p:cNvSpPr/>
-          <p:nvPr/>
-        </p:nvSpPr>
-        <p:spPr>
-          <a:xfrm>
-            <a:off x="4444898" y="2057400"/>
-            <a:ext cx="3301898" cy="3200400"/>
-          </a:xfrm>
-          <a:prstGeom prst="roundRect">
-            <a:avLst>
-              <a:gd name="adj" fmla="val 10000"/>
-            </a:avLst>
-          </a:prstGeom>
-          <a:solidFill>
-            <a:srgbClr val="F1F5F9"/>
-          </a:solidFill>
-          <a:ln w="15875">
-            <a:solidFill>
-              <a:srgbClr val="D3DDE6"/>
-            </a:solidFill>
-          </a:ln>
-          <a:effectLst/>
-        </p:spPr>
-        <p:style>
-          <a:lnRef idx="1">
-            <a:schemeClr val="accent1"/>
-          </a:lnRef>
-          <a:fillRef idx="3">
-            <a:schemeClr val="accent1"/>
-          </a:fillRef>
-          <a:effectRef idx="2">
-            <a:schemeClr val="accent1"/>
-          </a:effectRef>
-          <a:fontRef idx="minor">
-            <a:schemeClr val="lt1"/>
-          </a:fontRef>
-        </p:style>
-        <p:txBody>
-          <a:bodyPr rtlCol="0" anchor="ctr"/>
-          <a:lstStyle/>
-          <a:p>
-            <a:pPr algn="ctr"/>
-          </a:p>
-        </p:txBody>
-      </p:sp>
-      <p:sp>
-        <p:nvSpPr>
-          <p:cNvPr id="9" name="Rectangle 8"/>
-          <p:cNvSpPr/>
-          <p:nvPr/>
-        </p:nvSpPr>
-        <p:spPr>
-          <a:xfrm>
-            <a:off x="4646066" y="2331720"/>
-            <a:ext cx="640080" cy="38100"/>
-          </a:xfrm>
-          <a:prstGeom prst="rect">
-            <a:avLst/>
-          </a:prstGeom>
-          <a:solidFill>
-            <a:srgbClr val="0F766E"/>
-          </a:solidFill>
-          <a:ln>
-            <a:noFill/>
-          </a:ln>
-          <a:effectLst/>
-        </p:spPr>
-        <p:style>
-          <a:lnRef idx="1">
-            <a:schemeClr val="accent1"/>
-          </a:lnRef>
-          <a:fillRef idx="3">
-            <a:schemeClr val="accent1"/>
-          </a:fillRef>
-          <a:effectRef idx="2">
-            <a:schemeClr val="accent1"/>
-          </a:effectRef>
-          <a:fontRef idx="minor">
-            <a:schemeClr val="lt1"/>
-          </a:fontRef>
-        </p:style>
-        <p:txBody>
-          <a:bodyPr rtlCol="0" anchor="ctr"/>
-          <a:lstStyle/>
-          <a:p>
-            <a:pPr algn="ctr"/>
-          </a:p>
-        </p:txBody>
-      </p:sp>
-      <p:sp>
-        <p:nvSpPr>
-          <p:cNvPr id="10" name="TextBox 9"/>
-          <p:cNvSpPr txBox="1"/>
-          <p:nvPr/>
-        </p:nvSpPr>
-        <p:spPr>
-          <a:xfrm>
-            <a:off x="4646066" y="2560320"/>
-            <a:ext cx="2899562" cy="640080"/>
-          </a:xfrm>
-          <a:prstGeom prst="rect">
-            <a:avLst/>
-          </a:prstGeom>
-          <a:noFill/>
-        </p:spPr>
-        <p:txBody>
-          <a:bodyPr wrap="square" lIns="0" rIns="0" tIns="0" bIns="0" anchor="t">
-            <a:spAutoFit/>
-          </a:bodyPr>
-          <a:lstStyle/>
-          <a:p>
-            <a:pPr algn="l">
-              <a:lnSpc>
-                <a:spcPct val="105000"/>
-              </a:lnSpc>
-              <a:spcAft>
-                <a:spcPts val="200"/>
-              </a:spcAft>
-            </a:pPr>
-            <a:r>
-              <a:rPr sz="1800" b="1" i="0">
-                <a:solidFill>
-                  <a:srgbClr val="1F2937"/>
-                </a:solidFill>
-                <a:latin typeface="Calibri"/>
-              </a:rPr>
-              <a:t>Bad</a:t>
-            </a:r>
-          </a:p>
-        </p:txBody>
-      </p:sp>
-      <p:sp>
-        <p:nvSpPr>
-          <p:cNvPr id="11" name="TextBox 10"/>
-          <p:cNvSpPr txBox="1"/>
-          <p:nvPr/>
-        </p:nvSpPr>
-        <p:spPr>
-          <a:xfrm>
-            <a:off x="4646066" y="3246120"/>
-            <a:ext cx="2899562" cy="1737360"/>
-          </a:xfrm>
-          <a:prstGeom prst="rect">
-            <a:avLst/>
-          </a:prstGeom>
-          <a:noFill/>
-        </p:spPr>
-        <p:txBody>
-          <a:bodyPr wrap="square" lIns="0" rIns="0" tIns="0" bIns="0" anchor="t">
-            <a:spAutoFit/>
-          </a:bodyPr>
-          <a:lstStyle/>
-          <a:p>
-            <a:pPr algn="l">
-              <a:lnSpc>
-                <a:spcPct val="105000"/>
-              </a:lnSpc>
-              <a:spcAft>
-                <a:spcPts val="200"/>
-              </a:spcAft>
-            </a:pPr>
-            <a:r>
-              <a:rPr sz="1350" b="0" i="0">
-                <a:solidFill>
-                  <a:srgbClr val="333D4B"/>
-                </a:solidFill>
-                <a:latin typeface="Calibri"/>
-              </a:rPr>
-              <a:t>Requires judgment you cannot specify. The answer is not written down anywhere. A wrong answer reaches a patient, client or grade directly. Needs personal data to be useful at all.</a:t>
-            </a:r>
-          </a:p>
-        </p:txBody>
-      </p:sp>
-      <p:sp>
-        <p:nvSpPr>
-          <p:cNvPr id="12" name="Rounded Rectangle 11"/>
-          <p:cNvSpPr/>
-          <p:nvPr/>
-        </p:nvSpPr>
-        <p:spPr>
-          <a:xfrm>
-            <a:off x="8112556" y="2057400"/>
-            <a:ext cx="3301898" cy="3200400"/>
-          </a:xfrm>
-          <a:prstGeom prst="roundRect">
-            <a:avLst>
-              <a:gd name="adj" fmla="val 10000"/>
-            </a:avLst>
-          </a:prstGeom>
-          <a:solidFill>
-            <a:srgbClr val="F1F5F9"/>
-          </a:solidFill>
-          <a:ln w="15875">
-            <a:solidFill>
-              <a:srgbClr val="D3DDE6"/>
-            </a:solidFill>
-          </a:ln>
-          <a:effectLst/>
-        </p:spPr>
-        <p:style>
-          <a:lnRef idx="1">
-            <a:schemeClr val="accent1"/>
-          </a:lnRef>
-          <a:fillRef idx="3">
-            <a:schemeClr val="accent1"/>
-          </a:fillRef>
-          <a:effectRef idx="2">
-            <a:schemeClr val="accent1"/>
-          </a:effectRef>
-          <a:fontRef idx="minor">
-            <a:schemeClr val="lt1"/>
-          </a:fontRef>
-        </p:style>
-        <p:txBody>
-          <a:bodyPr rtlCol="0" anchor="ctr"/>
-          <a:lstStyle/>
-          <a:p>
-            <a:pPr algn="ctr"/>
-          </a:p>
-        </p:txBody>
-      </p:sp>
-      <p:sp>
-        <p:nvSpPr>
-          <p:cNvPr id="13" name="Rectangle 12"/>
-          <p:cNvSpPr/>
-          <p:nvPr/>
-        </p:nvSpPr>
-        <p:spPr>
-          <a:xfrm>
-            <a:off x="8313724" y="2331720"/>
-            <a:ext cx="640080" cy="38100"/>
-          </a:xfrm>
-          <a:prstGeom prst="rect">
-            <a:avLst/>
-          </a:prstGeom>
-          <a:solidFill>
-            <a:srgbClr val="0F766E"/>
-          </a:solidFill>
-          <a:ln>
-            <a:noFill/>
-          </a:ln>
-          <a:effectLst/>
-        </p:spPr>
-        <p:style>
-          <a:lnRef idx="1">
-            <a:schemeClr val="accent1"/>
-          </a:lnRef>
-          <a:fillRef idx="3">
-            <a:schemeClr val="accent1"/>
-          </a:fillRef>
-          <a:effectRef idx="2">
-            <a:schemeClr val="accent1"/>
-          </a:effectRef>
-          <a:fontRef idx="minor">
-            <a:schemeClr val="lt1"/>
-          </a:fontRef>
-        </p:style>
-        <p:txBody>
-          <a:bodyPr rtlCol="0" anchor="ctr"/>
-          <a:lstStyle/>
-          <a:p>
-            <a:pPr algn="ctr"/>
-          </a:p>
-        </p:txBody>
-      </p:sp>
-      <p:sp>
-        <p:nvSpPr>
-          <p:cNvPr id="14" name="TextBox 13"/>
-          <p:cNvSpPr txBox="1"/>
-          <p:nvPr/>
-        </p:nvSpPr>
-        <p:spPr>
-          <a:xfrm>
-            <a:off x="8313724" y="2560320"/>
-            <a:ext cx="2899562" cy="640080"/>
-          </a:xfrm>
-          <a:prstGeom prst="rect">
-            <a:avLst/>
-          </a:prstGeom>
-          <a:noFill/>
-        </p:spPr>
-        <p:txBody>
-          <a:bodyPr wrap="square" lIns="0" rIns="0" tIns="0" bIns="0" anchor="t">
-            <a:spAutoFit/>
-          </a:bodyPr>
-          <a:lstStyle/>
-          <a:p>
-            <a:pPr algn="l">
-              <a:lnSpc>
-                <a:spcPct val="105000"/>
-              </a:lnSpc>
-              <a:spcAft>
-                <a:spcPts val="200"/>
-              </a:spcAft>
-            </a:pPr>
-            <a:r>
-              <a:rPr sz="1800" b="1" i="0">
-                <a:solidFill>
-                  <a:srgbClr val="1F2937"/>
-                </a:solidFill>
-                <a:latin typeface="Calibri"/>
-              </a:rPr>
-              <a:t>The honest test</a:t>
-            </a:r>
-          </a:p>
-        </p:txBody>
-      </p:sp>
-      <p:sp>
-        <p:nvSpPr>
-          <p:cNvPr id="15" name="TextBox 14"/>
-          <p:cNvSpPr txBox="1"/>
-          <p:nvPr/>
-        </p:nvSpPr>
-        <p:spPr>
-          <a:xfrm>
-            <a:off x="8313724" y="3246120"/>
-            <a:ext cx="2899562" cy="1737360"/>
-          </a:xfrm>
-          <a:prstGeom prst="rect">
-            <a:avLst/>
-          </a:prstGeom>
-          <a:noFill/>
-        </p:spPr>
-        <p:txBody>
-          <a:bodyPr wrap="square" lIns="0" rIns="0" tIns="0" bIns="0" anchor="t">
-            <a:spAutoFit/>
-          </a:bodyPr>
-          <a:lstStyle/>
-          <a:p>
-            <a:pPr algn="l">
-              <a:lnSpc>
-                <a:spcPct val="105000"/>
-              </a:lnSpc>
-              <a:spcAft>
-                <a:spcPts val="200"/>
-              </a:spcAft>
-            </a:pPr>
-            <a:r>
-              <a:rPr sz="1350" b="0" i="0">
-                <a:solidFill>
-                  <a:srgbClr val="333D4B"/>
-                </a:solidFill>
-                <a:latin typeface="Calibri"/>
-              </a:rPr>
-              <a:t>Would you be comfortable showing this to the person most affected by it, and explaining exactly how it works? If not, redesign it rather than hiding it.</a:t>
-            </a:r>
-          </a:p>
-        </p:txBody>
-      </p:sp>
-      <p:sp>
-        <p:nvSpPr>
-          <p:cNvPr id="16" name="TextBox 15"/>
-          <p:cNvSpPr txBox="1"/>
-          <p:nvPr/>
-        </p:nvSpPr>
-        <p:spPr>
-          <a:xfrm>
-            <a:off x="777240" y="6355080"/>
-            <a:ext cx="10637215" cy="274320"/>
-          </a:xfrm>
-          <a:prstGeom prst="rect">
-            <a:avLst/>
-          </a:prstGeom>
-          <a:noFill/>
-        </p:spPr>
-        <p:txBody>
           <a:bodyPr wrap="square" lIns="0" rIns="0" tIns="0" bIns="0">
             <a:spAutoFit/>
           </a:bodyPr>
@@ -10480,7 +12371,7 @@
       </p:sp>
       <p:sp>
         <p:nvSpPr>
-          <p:cNvPr id="17" name="TextBox 16"/>
+          <p:cNvPr id="6" name="TextBox 5"/>
           <p:cNvSpPr txBox="1"/>
           <p:nvPr/>
         </p:nvSpPr>
